--- a/Halina Oliveira.Portfolio.pptx
+++ b/Halina Oliveira.Portfolio.pptx
@@ -9,14 +9,16 @@
     <p:sldId id="257" r:id="rId3"/>
     <p:sldId id="258" r:id="rId4"/>
     <p:sldId id="259" r:id="rId5"/>
-    <p:sldId id="260" r:id="rId6"/>
-    <p:sldId id="261" r:id="rId7"/>
-    <p:sldId id="262" r:id="rId8"/>
-    <p:sldId id="264" r:id="rId9"/>
-    <p:sldId id="267" r:id="rId10"/>
-    <p:sldId id="263" r:id="rId11"/>
-    <p:sldId id="265" r:id="rId12"/>
-    <p:sldId id="266" r:id="rId13"/>
+    <p:sldId id="261" r:id="rId6"/>
+    <p:sldId id="270" r:id="rId7"/>
+    <p:sldId id="271" r:id="rId8"/>
+    <p:sldId id="273" r:id="rId9"/>
+    <p:sldId id="274" r:id="rId10"/>
+    <p:sldId id="275" r:id="rId11"/>
+    <p:sldId id="276" r:id="rId12"/>
+    <p:sldId id="265" r:id="rId13"/>
+    <p:sldId id="268" r:id="rId14"/>
+    <p:sldId id="266" r:id="rId15"/>
   </p:sldIdLst>
   <p:sldSz cx="12192000" cy="6858000"/>
   <p:notesSz cx="6858000" cy="9144000"/>
@@ -293,7 +295,7 @@
             <a:fld id="{87DE6118-2437-4B30-8E3C-4D2BE6020583}" type="datetimeFigureOut">
               <a:rPr lang="en-US" dirty="0"/>
               <a:pPr/>
-              <a:t>1/26/2026</a:t>
+              <a:t>3/12/2026</a:t>
             </a:fld>
             <a:endParaRPr lang="en-US" dirty="0"/>
           </a:p>
@@ -437,6 +439,13 @@
               <a:tailEnd/>
             </a:ln>
           </p:spPr>
+          <p:txBody>
+            <a:bodyPr/>
+            <a:lstStyle/>
+            <a:p>
+              <a:endParaRPr lang="pt-BR"/>
+            </a:p>
+          </p:txBody>
         </p:sp>
         <p:sp>
           <p:nvSpPr>
@@ -495,6 +504,13 @@
               <a:tailEnd/>
             </a:ln>
           </p:spPr>
+          <p:txBody>
+            <a:bodyPr/>
+            <a:lstStyle/>
+            <a:p>
+              <a:endParaRPr lang="pt-BR"/>
+            </a:p>
+          </p:txBody>
         </p:sp>
       </p:grpSp>
     </p:spTree>
@@ -619,7 +635,7 @@
           <a:p>
             <a:fld id="{87DE6118-2437-4B30-8E3C-4D2BE6020583}" type="datetimeFigureOut">
               <a:rPr lang="en-US" dirty="0"/>
-              <a:t>1/26/2026</a:t>
+              <a:t>3/12/2026</a:t>
             </a:fld>
             <a:endParaRPr lang="en-US" dirty="0"/>
           </a:p>
@@ -794,7 +810,7 @@
           <a:p>
             <a:fld id="{87DE6118-2437-4B30-8E3C-4D2BE6020583}" type="datetimeFigureOut">
               <a:rPr lang="en-US" dirty="0"/>
-              <a:t>1/26/2026</a:t>
+              <a:t>3/12/2026</a:t>
             </a:fld>
             <a:endParaRPr lang="en-US" dirty="0"/>
           </a:p>
@@ -959,7 +975,7 @@
           <a:p>
             <a:fld id="{87DE6118-2437-4B30-8E3C-4D2BE6020583}" type="datetimeFigureOut">
               <a:rPr lang="en-US" dirty="0"/>
-              <a:t>1/26/2026</a:t>
+              <a:t>3/12/2026</a:t>
             </a:fld>
             <a:endParaRPr lang="en-US" dirty="0"/>
           </a:p>
@@ -1232,7 +1248,7 @@
             <a:fld id="{87DE6118-2437-4B30-8E3C-4D2BE6020583}" type="datetimeFigureOut">
               <a:rPr lang="en-US" dirty="0"/>
               <a:pPr/>
-              <a:t>1/26/2026</a:t>
+              <a:t>3/12/2026</a:t>
             </a:fld>
             <a:endParaRPr lang="en-US" dirty="0"/>
           </a:p>
@@ -1362,6 +1378,13 @@
             <a:tailEnd/>
           </a:ln>
         </p:spPr>
+        <p:txBody>
+          <a:bodyPr/>
+          <a:lstStyle/>
+          <a:p>
+            <a:endParaRPr lang="pt-BR"/>
+          </a:p>
+        </p:txBody>
       </p:sp>
     </p:spTree>
   </p:cSld>
@@ -1622,7 +1645,7 @@
           <a:p>
             <a:fld id="{87DE6118-2437-4B30-8E3C-4D2BE6020583}" type="datetimeFigureOut">
               <a:rPr lang="en-US" dirty="0"/>
-              <a:t>1/26/2026</a:t>
+              <a:t>3/12/2026</a:t>
             </a:fld>
             <a:endParaRPr lang="en-US" dirty="0"/>
           </a:p>
@@ -2094,7 +2117,7 @@
           <a:p>
             <a:fld id="{87DE6118-2437-4B30-8E3C-4D2BE6020583}" type="datetimeFigureOut">
               <a:rPr lang="en-US" dirty="0"/>
-              <a:t>1/26/2026</a:t>
+              <a:t>3/12/2026</a:t>
             </a:fld>
             <a:endParaRPr lang="en-US" dirty="0"/>
           </a:p>
@@ -2207,7 +2230,7 @@
           <a:p>
             <a:fld id="{87DE6118-2437-4B30-8E3C-4D2BE6020583}" type="datetimeFigureOut">
               <a:rPr lang="en-US" dirty="0"/>
-              <a:t>1/26/2026</a:t>
+              <a:t>3/12/2026</a:t>
             </a:fld>
             <a:endParaRPr lang="en-US" dirty="0"/>
           </a:p>
@@ -2297,7 +2320,7 @@
           <a:p>
             <a:fld id="{87DE6118-2437-4B30-8E3C-4D2BE6020583}" type="datetimeFigureOut">
               <a:rPr lang="en-US" dirty="0"/>
-              <a:t>1/26/2026</a:t>
+              <a:t>3/12/2026</a:t>
             </a:fld>
             <a:endParaRPr lang="en-US" dirty="0"/>
           </a:p>
@@ -2407,6 +2430,13 @@
             <a:schemeClr val="lt1"/>
           </a:fontRef>
         </p:style>
+        <p:txBody>
+          <a:bodyPr/>
+          <a:lstStyle/>
+          <a:p>
+            <a:endParaRPr lang="pt-BR"/>
+          </a:p>
+        </p:txBody>
       </p:sp>
       <p:sp>
         <p:nvSpPr>
@@ -2639,7 +2669,7 @@
             <a:fld id="{87DE6118-2437-4B30-8E3C-4D2BE6020583}" type="datetimeFigureOut">
               <a:rPr lang="en-US" dirty="0"/>
               <a:pPr/>
-              <a:t>1/26/2026</a:t>
+              <a:t>3/12/2026</a:t>
             </a:fld>
             <a:endParaRPr lang="en-US" dirty="0"/>
           </a:p>
@@ -2751,6 +2781,13 @@
             <a:schemeClr val="lt1"/>
           </a:fontRef>
         </p:style>
+        <p:txBody>
+          <a:bodyPr/>
+          <a:lstStyle/>
+          <a:p>
+            <a:endParaRPr lang="pt-BR"/>
+          </a:p>
+        </p:txBody>
       </p:sp>
     </p:spTree>
   </p:cSld>
@@ -2814,6 +2851,13 @@
             <a:schemeClr val="lt1"/>
           </a:fontRef>
         </p:style>
+        <p:txBody>
+          <a:bodyPr/>
+          <a:lstStyle/>
+          <a:p>
+            <a:endParaRPr lang="pt-BR"/>
+          </a:p>
+        </p:txBody>
       </p:sp>
       <p:sp>
         <p:nvSpPr>
@@ -3024,7 +3068,7 @@
             <a:fld id="{87DE6118-2437-4B30-8E3C-4D2BE6020583}" type="datetimeFigureOut">
               <a:rPr lang="en-US" dirty="0"/>
               <a:pPr/>
-              <a:t>1/26/2026</a:t>
+              <a:t>3/12/2026</a:t>
             </a:fld>
             <a:endParaRPr lang="en-US" dirty="0"/>
           </a:p>
@@ -3136,6 +3180,13 @@
             <a:schemeClr val="lt1"/>
           </a:fontRef>
         </p:style>
+        <p:txBody>
+          <a:bodyPr/>
+          <a:lstStyle/>
+          <a:p>
+            <a:endParaRPr lang="pt-BR"/>
+          </a:p>
+        </p:txBody>
       </p:sp>
     </p:spTree>
   </p:cSld>
@@ -3299,7 +3350,7 @@
             <a:fld id="{87DE6118-2437-4B30-8E3C-4D2BE6020583}" type="datetimeFigureOut">
               <a:rPr lang="en-US" dirty="0"/>
               <a:pPr/>
-              <a:t>1/26/2026</a:t>
+              <a:t>3/12/2026</a:t>
             </a:fld>
             <a:endParaRPr lang="en-US" dirty="0"/>
           </a:p>
@@ -3417,6 +3468,13 @@
             <a:schemeClr val="lt1"/>
           </a:fontRef>
         </p:style>
+        <p:txBody>
+          <a:bodyPr/>
+          <a:lstStyle/>
+          <a:p>
+            <a:endParaRPr lang="pt-BR"/>
+          </a:p>
+        </p:txBody>
       </p:sp>
     </p:spTree>
   </p:cSld>
@@ -3834,7 +3892,10 @@
           <a:lstStyle/>
           <a:p>
             <a:r>
-              <a:rPr lang="pt-BR" dirty="0"/>
+              <a:rPr lang="pt-BR" dirty="0">
+                <a:latin typeface="Arial" panose="020B0604020202020204" pitchFamily="34" charset="0"/>
+                <a:cs typeface="Arial" panose="020B0604020202020204" pitchFamily="34" charset="0"/>
+              </a:rPr>
               <a:t>Halina Oliveira</a:t>
             </a:r>
           </a:p>
@@ -3858,21 +3919,27 @@
         </p:nvSpPr>
         <p:spPr>
           <a:xfrm>
-            <a:off x="4308365" y="3788206"/>
-            <a:ext cx="3575270" cy="685320"/>
+            <a:off x="1774451" y="3788206"/>
+            <a:ext cx="8643098" cy="685320"/>
           </a:xfrm>
         </p:spPr>
         <p:txBody>
           <a:bodyPr>
-            <a:normAutofit lnSpcReduction="10000"/>
+            <a:normAutofit/>
           </a:bodyPr>
           <a:lstStyle/>
           <a:p>
             <a:r>
-              <a:rPr lang="pt-BR" sz="4000" dirty="0"/>
-              <a:t>Portfólio</a:t>
-            </a:r>
-            <a:endParaRPr lang="pt-BR" dirty="0"/>
+              <a:rPr lang="pt-BR" sz="2400" dirty="0">
+                <a:latin typeface="Arial" panose="020B0604020202020204" pitchFamily="34" charset="0"/>
+                <a:cs typeface="Arial" panose="020B0604020202020204" pitchFamily="34" charset="0"/>
+              </a:rPr>
+              <a:t>Análise de Dados | SQL | Python</a:t>
+            </a:r>
+            <a:endParaRPr lang="pt-BR" sz="1400" dirty="0">
+              <a:latin typeface="Arial" panose="020B0604020202020204" pitchFamily="34" charset="0"/>
+              <a:cs typeface="Arial" panose="020B0604020202020204" pitchFamily="34" charset="0"/>
+            </a:endParaRPr>
           </a:p>
         </p:txBody>
       </p:sp>
@@ -3906,189 +3973,12 @@
           <a:chExt cx="0" cy="0"/>
         </a:xfrm>
       </p:grpSpPr>
-      <p:sp>
-        <p:nvSpPr>
-          <p:cNvPr id="2" name="Título 1">
+      <p:pic>
+        <p:nvPicPr>
+          <p:cNvPr id="5" name="Imagem 4">
             <a:extLst>
               <a:ext uri="{FF2B5EF4-FFF2-40B4-BE49-F238E27FC236}">
-                <a16:creationId xmlns:a16="http://schemas.microsoft.com/office/drawing/2014/main" id="{92F824FB-4221-A84E-4A42-021F3215D20E}"/>
-              </a:ext>
-            </a:extLst>
-          </p:cNvPr>
-          <p:cNvSpPr>
-            <a:spLocks noGrp="1"/>
-          </p:cNvSpPr>
-          <p:nvPr>
-            <p:ph type="title"/>
-          </p:nvPr>
-        </p:nvSpPr>
-        <p:spPr>
-          <a:xfrm>
-            <a:off x="1491175" y="449240"/>
-            <a:ext cx="9805182" cy="788717"/>
-          </a:xfrm>
-        </p:spPr>
-        <p:txBody>
-          <a:bodyPr>
-            <a:noAutofit/>
-          </a:bodyPr>
-          <a:lstStyle/>
-          <a:p>
-            <a:pPr algn="ctr"/>
-            <a:r>
-              <a:rPr lang="pt-BR" sz="4000" b="1" dirty="0"/>
-              <a:t>Análise de Perdas e Oportunidades</a:t>
-            </a:r>
-          </a:p>
-        </p:txBody>
-      </p:sp>
-      <p:sp>
-        <p:nvSpPr>
-          <p:cNvPr id="8" name="AutoShape 2">
-            <a:extLst>
-              <a:ext uri="{FF2B5EF4-FFF2-40B4-BE49-F238E27FC236}">
-                <a16:creationId xmlns:a16="http://schemas.microsoft.com/office/drawing/2014/main" id="{6CF246AF-E08E-093A-DBF4-D853FB5B01DE}"/>
-              </a:ext>
-            </a:extLst>
-          </p:cNvPr>
-          <p:cNvSpPr>
-            <a:spLocks noChangeAspect="1" noChangeArrowheads="1"/>
-          </p:cNvSpPr>
-          <p:nvPr/>
-        </p:nvSpPr>
-        <p:spPr bwMode="auto">
-          <a:xfrm>
-            <a:off x="7057292" y="3806484"/>
-            <a:ext cx="5134708" cy="2745544"/>
-          </a:xfrm>
-          <a:prstGeom prst="rect">
-            <a:avLst/>
-          </a:prstGeom>
-          <a:noFill/>
-          <a:extLst>
-            <a:ext uri="{909E8E84-426E-40DD-AFC4-6F175D3DCCD1}">
-              <a14:hiddenFill xmlns:a14="http://schemas.microsoft.com/office/drawing/2010/main">
-                <a:solidFill>
-                  <a:srgbClr val="FFFFFF"/>
-                </a:solidFill>
-              </a14:hiddenFill>
-            </a:ext>
-          </a:extLst>
-        </p:spPr>
-        <p:txBody>
-          <a:bodyPr vert="horz" wrap="square" lIns="91440" tIns="45720" rIns="91440" bIns="45720" numCol="1" anchor="t" anchorCtr="0" compatLnSpc="1">
-            <a:prstTxWarp prst="textNoShape">
-              <a:avLst/>
-            </a:prstTxWarp>
-          </a:bodyPr>
-          <a:lstStyle/>
-          <a:p>
-            <a:endParaRPr lang="pt-BR"/>
-          </a:p>
-        </p:txBody>
-      </p:sp>
-      <p:sp>
-        <p:nvSpPr>
-          <p:cNvPr id="9" name="AutoShape 4">
-            <a:extLst>
-              <a:ext uri="{FF2B5EF4-FFF2-40B4-BE49-F238E27FC236}">
-                <a16:creationId xmlns:a16="http://schemas.microsoft.com/office/drawing/2014/main" id="{D3CC52FB-EAB2-A785-490A-11B7B2FD78B9}"/>
-              </a:ext>
-            </a:extLst>
-          </p:cNvPr>
-          <p:cNvSpPr>
-            <a:spLocks noChangeAspect="1" noChangeArrowheads="1"/>
-          </p:cNvSpPr>
-          <p:nvPr/>
-        </p:nvSpPr>
-        <p:spPr bwMode="auto">
-          <a:xfrm>
-            <a:off x="5943599" y="3276599"/>
-            <a:ext cx="3875649" cy="3875649"/>
-          </a:xfrm>
-          <a:prstGeom prst="rect">
-            <a:avLst/>
-          </a:prstGeom>
-          <a:noFill/>
-          <a:extLst>
-            <a:ext uri="{909E8E84-426E-40DD-AFC4-6F175D3DCCD1}">
-              <a14:hiddenFill xmlns:a14="http://schemas.microsoft.com/office/drawing/2010/main">
-                <a:solidFill>
-                  <a:srgbClr val="FFFFFF"/>
-                </a:solidFill>
-              </a14:hiddenFill>
-            </a:ext>
-          </a:extLst>
-        </p:spPr>
-        <p:txBody>
-          <a:bodyPr vert="horz" wrap="square" lIns="91440" tIns="45720" rIns="91440" bIns="45720" numCol="1" anchor="t" anchorCtr="0" compatLnSpc="1">
-            <a:prstTxWarp prst="textNoShape">
-              <a:avLst/>
-            </a:prstTxWarp>
-          </a:bodyPr>
-          <a:lstStyle/>
-          <a:p>
-            <a:endParaRPr lang="pt-BR"/>
-          </a:p>
-        </p:txBody>
-      </p:sp>
-      <p:sp>
-        <p:nvSpPr>
-          <p:cNvPr id="12" name="CaixaDeTexto 11">
-            <a:extLst>
-              <a:ext uri="{FF2B5EF4-FFF2-40B4-BE49-F238E27FC236}">
-                <a16:creationId xmlns:a16="http://schemas.microsoft.com/office/drawing/2014/main" id="{F5484C5F-9B4A-795E-5749-7AFE3DD74A3D}"/>
-              </a:ext>
-            </a:extLst>
-          </p:cNvPr>
-          <p:cNvSpPr txBox="1"/>
-          <p:nvPr/>
-        </p:nvSpPr>
-        <p:spPr>
-          <a:xfrm>
-            <a:off x="1405597" y="1681910"/>
-            <a:ext cx="10523806" cy="2739211"/>
-          </a:xfrm>
-          <a:prstGeom prst="rect">
-            <a:avLst/>
-          </a:prstGeom>
-          <a:noFill/>
-        </p:spPr>
-        <p:txBody>
-          <a:bodyPr wrap="square">
-            <a:spAutoFit/>
-          </a:bodyPr>
-          <a:lstStyle/>
-          <a:p>
-            <a:pPr algn="ctr"/>
-            <a:r>
-              <a:rPr lang="pt-BR" sz="2400" b="0" i="0" dirty="0">
-                <a:effectLst/>
-              </a:rPr>
-              <a:t>Através do tratamento de dados brutos, quantificamos um custo de oportunidade de R$ 523.680,45. Esta análise é o primeiro passo para estratégias de recuperação de carrinho e aumento direto da receita líquida da empresa</a:t>
-            </a:r>
-            <a:br>
-              <a:rPr lang="pt-BR" sz="2400" b="0" i="0" dirty="0">
-                <a:effectLst/>
-              </a:rPr>
-            </a:br>
-            <a:r>
-              <a:rPr lang="pt-BR" sz="2400" dirty="0"/>
-              <a:t>Identificação de perda de receita: 203 pedidos não convertidos geraram um impacto negativo de R$ 523 mil. Análise essencial para direcionar esforços de marketing e tecnologia na recuperação de vendas</a:t>
-            </a:r>
-            <a:r>
-              <a:rPr lang="pt-BR" sz="2800" dirty="0"/>
-              <a:t>.</a:t>
-            </a:r>
-          </a:p>
-        </p:txBody>
-      </p:sp>
-      <p:pic>
-        <p:nvPicPr>
-          <p:cNvPr id="18" name="Imagem 17">
-            <a:extLst>
-              <a:ext uri="{FF2B5EF4-FFF2-40B4-BE49-F238E27FC236}">
-                <a16:creationId xmlns:a16="http://schemas.microsoft.com/office/drawing/2014/main" id="{ADE448EA-1452-E989-4DED-301138FAA204}"/>
+                <a16:creationId xmlns:a16="http://schemas.microsoft.com/office/drawing/2014/main" id="{4647E377-39D0-6199-0C5D-6BC572481562}"/>
               </a:ext>
             </a:extLst>
           </p:cNvPr>
@@ -4098,38 +3988,123 @@
           <p:nvPr/>
         </p:nvPicPr>
         <p:blipFill>
-          <a:blip r:embed="rId2">
-            <a:extLst>
-              <a:ext uri="{BEBA8EAE-BF5A-486C-A8C5-ECC9F3942E4B}">
-                <a14:imgProps xmlns:a14="http://schemas.microsoft.com/office/drawing/2010/main">
-                  <a14:imgLayer r:embed="rId3">
-                    <a14:imgEffect>
-                      <a14:sharpenSoften amount="50000"/>
-                    </a14:imgEffect>
-                  </a14:imgLayer>
-                </a14:imgProps>
-              </a:ext>
-            </a:extLst>
-          </a:blip>
-          <a:srcRect l="-399" r="1603" b="3240"/>
+          <a:blip r:embed="rId2"/>
           <a:stretch>
             <a:fillRect/>
           </a:stretch>
         </p:blipFill>
         <p:spPr>
           <a:xfrm>
-            <a:off x="2612537" y="4951006"/>
-            <a:ext cx="7980435" cy="1457754"/>
+            <a:off x="1081536" y="1190338"/>
+            <a:ext cx="4975278" cy="2799470"/>
           </a:xfrm>
           <a:prstGeom prst="rect">
             <a:avLst/>
           </a:prstGeom>
         </p:spPr>
       </p:pic>
+      <p:pic>
+        <p:nvPicPr>
+          <p:cNvPr id="7" name="Imagem 6">
+            <a:extLst>
+              <a:ext uri="{FF2B5EF4-FFF2-40B4-BE49-F238E27FC236}">
+                <a16:creationId xmlns:a16="http://schemas.microsoft.com/office/drawing/2014/main" id="{AC1DF08A-568A-1F21-EA6A-78A88AEEDDB4}"/>
+              </a:ext>
+            </a:extLst>
+          </p:cNvPr>
+          <p:cNvPicPr>
+            <a:picLocks noChangeAspect="1"/>
+          </p:cNvPicPr>
+          <p:nvPr/>
+        </p:nvPicPr>
+        <p:blipFill>
+          <a:blip r:embed="rId3"/>
+          <a:stretch>
+            <a:fillRect/>
+          </a:stretch>
+        </p:blipFill>
+        <p:spPr>
+          <a:xfrm>
+            <a:off x="6750817" y="1190338"/>
+            <a:ext cx="4975278" cy="2799470"/>
+          </a:xfrm>
+          <a:prstGeom prst="rect">
+            <a:avLst/>
+          </a:prstGeom>
+        </p:spPr>
+      </p:pic>
+      <p:pic>
+        <p:nvPicPr>
+          <p:cNvPr id="9" name="Imagem 8">
+            <a:extLst>
+              <a:ext uri="{FF2B5EF4-FFF2-40B4-BE49-F238E27FC236}">
+                <a16:creationId xmlns:a16="http://schemas.microsoft.com/office/drawing/2014/main" id="{F08D1A36-7656-7380-8CD0-AC4ED459652E}"/>
+              </a:ext>
+            </a:extLst>
+          </p:cNvPr>
+          <p:cNvPicPr>
+            <a:picLocks noChangeAspect="1"/>
+          </p:cNvPicPr>
+          <p:nvPr/>
+        </p:nvPicPr>
+        <p:blipFill>
+          <a:blip r:embed="rId4"/>
+          <a:stretch>
+            <a:fillRect/>
+          </a:stretch>
+        </p:blipFill>
+        <p:spPr>
+          <a:xfrm>
+            <a:off x="4028045" y="4058530"/>
+            <a:ext cx="4975278" cy="2693963"/>
+          </a:xfrm>
+          <a:prstGeom prst="rect">
+            <a:avLst/>
+          </a:prstGeom>
+        </p:spPr>
+      </p:pic>
+      <p:sp>
+        <p:nvSpPr>
+          <p:cNvPr id="10" name="CaixaDeTexto 9">
+            <a:extLst>
+              <a:ext uri="{FF2B5EF4-FFF2-40B4-BE49-F238E27FC236}">
+                <a16:creationId xmlns:a16="http://schemas.microsoft.com/office/drawing/2014/main" id="{56299EF8-A746-F829-6749-0E85B241149A}"/>
+              </a:ext>
+            </a:extLst>
+          </p:cNvPr>
+          <p:cNvSpPr txBox="1"/>
+          <p:nvPr/>
+        </p:nvSpPr>
+        <p:spPr>
+          <a:xfrm>
+            <a:off x="1081536" y="253218"/>
+            <a:ext cx="10031941" cy="584775"/>
+          </a:xfrm>
+          <a:prstGeom prst="rect">
+            <a:avLst/>
+          </a:prstGeom>
+          <a:noFill/>
+        </p:spPr>
+        <p:txBody>
+          <a:bodyPr wrap="square" rtlCol="0">
+            <a:spAutoFit/>
+          </a:bodyPr>
+          <a:lstStyle/>
+          <a:p>
+            <a:r>
+              <a:rPr lang="pt-BR" sz="3200" dirty="0">
+                <a:latin typeface="Arial" panose="020B0604020202020204" pitchFamily="34" charset="0"/>
+                <a:cs typeface="Arial" panose="020B0604020202020204" pitchFamily="34" charset="0"/>
+              </a:rPr>
+              <a:t>Análise Visual do Desempenho de Vendas</a:t>
+            </a:r>
+          </a:p>
+        </p:txBody>
+      </p:sp>
     </p:spTree>
     <p:extLst>
       <p:ext uri="{BB962C8B-B14F-4D97-AF65-F5344CB8AC3E}">
-        <p14:creationId xmlns:p14="http://schemas.microsoft.com/office/powerpoint/2010/main" val="1497256881"/>
+        <p14:creationId xmlns:p14="http://schemas.microsoft.com/office/powerpoint/2010/main" val="201241194"/>
       </p:ext>
     </p:extLst>
   </p:cSld>
@@ -4161,7 +4136,7 @@
           <p:cNvPr id="2" name="Título 1">
             <a:extLst>
               <a:ext uri="{FF2B5EF4-FFF2-40B4-BE49-F238E27FC236}">
-                <a16:creationId xmlns:a16="http://schemas.microsoft.com/office/drawing/2014/main" id="{704E641E-BCAF-C981-2CF1-6784B87C7F5D}"/>
+                <a16:creationId xmlns:a16="http://schemas.microsoft.com/office/drawing/2014/main" id="{6D8518B7-A221-CE8C-8E31-CEE3B6D331AB}"/>
               </a:ext>
             </a:extLst>
           </p:cNvPr>
@@ -4175,79 +4150,378 @@
         <p:spPr>
           <a:xfrm>
             <a:off x="1371600" y="685800"/>
-            <a:ext cx="2919046" cy="763172"/>
+            <a:ext cx="9601200" cy="917917"/>
           </a:xfrm>
         </p:spPr>
         <p:txBody>
           <a:bodyPr>
-            <a:noAutofit/>
+            <a:normAutofit/>
           </a:bodyPr>
           <a:lstStyle/>
           <a:p>
             <a:r>
-              <a:rPr lang="pt-BR" sz="4000" b="1" dirty="0"/>
-              <a:t>Conclusão</a:t>
-            </a:r>
-          </a:p>
-        </p:txBody>
-      </p:sp>
-      <p:sp>
-        <p:nvSpPr>
-          <p:cNvPr id="3" name="Espaço Reservado para Conteúdo 2">
+              <a:rPr lang="pt-BR" sz="3200" dirty="0">
+                <a:latin typeface="Arial" panose="020B0604020202020204" pitchFamily="34" charset="0"/>
+                <a:cs typeface="Arial" panose="020B0604020202020204" pitchFamily="34" charset="0"/>
+              </a:rPr>
+              <a:t>Insights de Negócio</a:t>
+            </a:r>
+          </a:p>
+        </p:txBody>
+      </p:sp>
+      <p:sp>
+        <p:nvSpPr>
+          <p:cNvPr id="4" name="Rectangle 1">
             <a:extLst>
               <a:ext uri="{FF2B5EF4-FFF2-40B4-BE49-F238E27FC236}">
-                <a16:creationId xmlns:a16="http://schemas.microsoft.com/office/drawing/2014/main" id="{81E2BE94-26CB-24DC-5EB2-0ABE8E5E8D4E}"/>
+                <a16:creationId xmlns:a16="http://schemas.microsoft.com/office/drawing/2014/main" id="{FB7B00A4-EBDB-B0AB-34D9-2CC6C8C75F50}"/>
               </a:ext>
             </a:extLst>
           </p:cNvPr>
           <p:cNvSpPr>
-            <a:spLocks noGrp="1"/>
+            <a:spLocks noGrp="1" noChangeArrowheads="1"/>
           </p:cNvSpPr>
           <p:nvPr>
             <p:ph idx="1"/>
           </p:nvPr>
         </p:nvSpPr>
-        <p:spPr>
-          <a:xfrm>
-            <a:off x="1371600" y="2046849"/>
-            <a:ext cx="9601200" cy="3886200"/>
-          </a:xfrm>
-        </p:spPr>
-        <p:txBody>
-          <a:bodyPr>
-            <a:normAutofit fontScale="92500"/>
+        <p:spPr bwMode="auto">
+          <a:xfrm>
+            <a:off x="921433" y="1720841"/>
+            <a:ext cx="10979833" cy="3416320"/>
+          </a:xfrm>
+          <a:prstGeom prst="rect">
+            <a:avLst/>
+          </a:prstGeom>
+          <a:noFill/>
+          <a:ln>
+            <a:noFill/>
+          </a:ln>
+          <a:effectLst/>
+          <a:extLst>
+            <a:ext uri="{909E8E84-426E-40DD-AFC4-6F175D3DCCD1}">
+              <a14:hiddenFill xmlns:a14="http://schemas.microsoft.com/office/drawing/2010/main">
+                <a:solidFill>
+                  <a:schemeClr val="accent1"/>
+                </a:solidFill>
+              </a14:hiddenFill>
+            </a:ext>
+            <a:ext uri="{91240B29-F687-4F45-9708-019B960494DF}">
+              <a14:hiddenLine xmlns:a14="http://schemas.microsoft.com/office/drawing/2010/main" w="9525">
+                <a:solidFill>
+                  <a:schemeClr val="tx1"/>
+                </a:solidFill>
+                <a:miter lim="800000"/>
+                <a:headEnd/>
+                <a:tailEnd/>
+              </a14:hiddenLine>
+            </a:ext>
+            <a:ext uri="{AF507438-7753-43E0-B8FC-AC1667EBCBE1}">
+              <a14:hiddenEffects xmlns:a14="http://schemas.microsoft.com/office/drawing/2010/main">
+                <a:effectLst>
+                  <a:outerShdw dist="35921" dir="2700000" algn="ctr" rotWithShape="0">
+                    <a:schemeClr val="bg2"/>
+                  </a:outerShdw>
+                </a:effectLst>
+              </a14:hiddenEffects>
+            </a:ext>
+          </a:extLst>
+        </p:spPr>
+        <p:txBody>
+          <a:bodyPr vert="horz" wrap="square" lIns="91440" tIns="45720" rIns="91440" bIns="45720" numCol="1" anchor="ctr" anchorCtr="0" compatLnSpc="1">
+            <a:prstTxWarp prst="textNoShape">
+              <a:avLst/>
+            </a:prstTxWarp>
+            <a:spAutoFit/>
           </a:bodyPr>
           <a:lstStyle/>
           <a:p>
-            <a:pPr marL="0" indent="0" algn="ctr">
-              <a:buNone/>
+            <a:pPr marR="0" lvl="0" algn="l" defTabSz="914400" rtl="0" eaLnBrk="0" fontAlgn="base" latinLnBrk="0" hangingPunct="0">
+              <a:lnSpc>
+                <a:spcPct val="100000"/>
+              </a:lnSpc>
+              <a:spcBef>
+                <a:spcPct val="0"/>
+              </a:spcBef>
+              <a:spcAft>
+                <a:spcPct val="0"/>
+              </a:spcAft>
+              <a:buClrTx/>
+              <a:buSzTx/>
+              <a:buFont typeface="Wingdings" panose="05000000000000000000" pitchFamily="2" charset="2"/>
+              <a:buChar char="§"/>
+              <a:tabLst/>
             </a:pPr>
             <a:r>
-              <a:rPr lang="pt-BR" sz="2600" dirty="0"/>
-              <a:t>Este projeto demonstrou como a estruturação correta de um banco de dados PostgreSQL e a análise estratégica de BI podem transformar números brutos em ações concretas. Ao identificar um potencial de faturamento de mais de R$ 500 mil em oportunidades de recuperação, provei que a inteligência de dados é o principal motor para a redução de perdas e o aumento da eficiência operacional.</a:t>
-            </a:r>
-          </a:p>
-          <a:p>
-            <a:pPr marL="0" indent="0" algn="ctr">
-              <a:buNone/>
+              <a:rPr kumimoji="0" lang="pt-BR" altLang="pt-BR" sz="2400" b="1" i="0" u="none" strike="noStrike" cap="none" normalizeH="0" baseline="0" dirty="0">
+                <a:ln>
+                  <a:noFill/>
+                </a:ln>
+                <a:solidFill>
+                  <a:schemeClr val="tx1"/>
+                </a:solidFill>
+                <a:effectLst/>
+                <a:latin typeface="Arial" panose="020B0604020202020204" pitchFamily="34" charset="0"/>
+              </a:rPr>
+              <a:t>Marketplace lidera o faturamento</a:t>
+            </a:r>
+            <a:r>
+              <a:rPr kumimoji="0" lang="pt-BR" altLang="pt-BR" sz="2400" b="0" i="0" u="none" strike="noStrike" cap="none" normalizeH="0" baseline="0" dirty="0">
+                <a:ln>
+                  <a:noFill/>
+                </a:ln>
+                <a:solidFill>
+                  <a:schemeClr val="tx1"/>
+                </a:solidFill>
+                <a:effectLst/>
+                <a:latin typeface="Arial" panose="020B0604020202020204" pitchFamily="34" charset="0"/>
+              </a:rPr>
+              <a:t>, representando a maior parte da receita.</a:t>
+            </a:r>
+            <a:br>
+              <a:rPr kumimoji="0" lang="pt-BR" altLang="pt-BR" sz="2400" b="0" i="0" u="none" strike="noStrike" cap="none" normalizeH="0" baseline="0" dirty="0">
+                <a:ln>
+                  <a:noFill/>
+                </a:ln>
+                <a:solidFill>
+                  <a:schemeClr val="tx1"/>
+                </a:solidFill>
+                <a:effectLst/>
+                <a:latin typeface="Arial" panose="020B0604020202020204" pitchFamily="34" charset="0"/>
+              </a:rPr>
+            </a:br>
+            <a:endParaRPr kumimoji="0" lang="pt-BR" altLang="pt-BR" sz="2400" b="0" i="0" u="none" strike="noStrike" cap="none" normalizeH="0" baseline="0" dirty="0">
+              <a:ln>
+                <a:noFill/>
+              </a:ln>
+              <a:solidFill>
+                <a:schemeClr val="tx1"/>
+              </a:solidFill>
+              <a:effectLst/>
+              <a:latin typeface="Arial" panose="020B0604020202020204" pitchFamily="34" charset="0"/>
+            </a:endParaRPr>
+          </a:p>
+          <a:p>
+            <a:pPr marR="0" lvl="0" algn="l" defTabSz="914400" rtl="0" eaLnBrk="0" fontAlgn="base" latinLnBrk="0" hangingPunct="0">
+              <a:lnSpc>
+                <a:spcPct val="100000"/>
+              </a:lnSpc>
+              <a:spcBef>
+                <a:spcPct val="0"/>
+              </a:spcBef>
+              <a:spcAft>
+                <a:spcPct val="0"/>
+              </a:spcAft>
+              <a:buClrTx/>
+              <a:buSzTx/>
+              <a:buFont typeface="Wingdings" panose="05000000000000000000" pitchFamily="2" charset="2"/>
+              <a:buChar char="§"/>
+              <a:tabLst/>
             </a:pPr>
             <a:r>
-              <a:rPr lang="pt-BR" sz="2600" dirty="0"/>
-              <a:t>Estou em busca de novos desafios onde eu possa aplicar esse rigor técnico e visão analítica para ajudar a otimizar processos, garantir a integridade das informações e impulsionar seus resultados financeiros.</a:t>
-            </a:r>
-          </a:p>
-          <a:p>
-            <a:pPr marL="0" indent="0">
-              <a:buNone/>
+              <a:rPr kumimoji="0" lang="pt-BR" altLang="pt-BR" sz="2400" b="1" i="0" u="none" strike="noStrike" cap="none" normalizeH="0" baseline="0" dirty="0">
+                <a:ln>
+                  <a:noFill/>
+                </a:ln>
+                <a:solidFill>
+                  <a:schemeClr val="tx1"/>
+                </a:solidFill>
+                <a:effectLst/>
+                <a:latin typeface="Arial" panose="020B0604020202020204" pitchFamily="34" charset="0"/>
+              </a:rPr>
+              <a:t>Site apresenta forte participação</a:t>
+            </a:r>
+            <a:r>
+              <a:rPr kumimoji="0" lang="pt-BR" altLang="pt-BR" sz="2400" b="0" i="0" u="none" strike="noStrike" cap="none" normalizeH="0" baseline="0" dirty="0">
+                <a:ln>
+                  <a:noFill/>
+                </a:ln>
+                <a:solidFill>
+                  <a:schemeClr val="tx1"/>
+                </a:solidFill>
+                <a:effectLst/>
+                <a:latin typeface="Arial" panose="020B0604020202020204" pitchFamily="34" charset="0"/>
+              </a:rPr>
+              <a:t>, consolidando-se como segundo canal.</a:t>
+            </a:r>
+            <a:br>
+              <a:rPr kumimoji="0" lang="pt-BR" altLang="pt-BR" sz="2400" b="0" i="0" u="none" strike="noStrike" cap="none" normalizeH="0" baseline="0" dirty="0">
+                <a:ln>
+                  <a:noFill/>
+                </a:ln>
+                <a:solidFill>
+                  <a:schemeClr val="tx1"/>
+                </a:solidFill>
+                <a:effectLst/>
+                <a:latin typeface="Arial" panose="020B0604020202020204" pitchFamily="34" charset="0"/>
+              </a:rPr>
+            </a:br>
+            <a:endParaRPr kumimoji="0" lang="pt-BR" altLang="pt-BR" sz="2400" b="0" i="0" u="none" strike="noStrike" cap="none" normalizeH="0" baseline="0" dirty="0">
+              <a:ln>
+                <a:noFill/>
+              </a:ln>
+              <a:solidFill>
+                <a:schemeClr val="tx1"/>
+              </a:solidFill>
+              <a:effectLst/>
+              <a:latin typeface="Arial" panose="020B0604020202020204" pitchFamily="34" charset="0"/>
+            </a:endParaRPr>
+          </a:p>
+          <a:p>
+            <a:pPr marR="0" lvl="0" algn="l" defTabSz="914400" rtl="0" eaLnBrk="0" fontAlgn="base" latinLnBrk="0" hangingPunct="0">
+              <a:lnSpc>
+                <a:spcPct val="100000"/>
+              </a:lnSpc>
+              <a:spcBef>
+                <a:spcPct val="0"/>
+              </a:spcBef>
+              <a:spcAft>
+                <a:spcPct val="0"/>
+              </a:spcAft>
+              <a:buClrTx/>
+              <a:buSzTx/>
+              <a:buFont typeface="Wingdings" panose="05000000000000000000" pitchFamily="2" charset="2"/>
+              <a:buChar char="§"/>
+              <a:tabLst/>
             </a:pPr>
-            <a:endParaRPr lang="pt-BR" sz="1800" dirty="0"/>
+            <a:r>
+              <a:rPr kumimoji="0" lang="pt-BR" altLang="pt-BR" sz="2400" b="1" i="0" u="none" strike="noStrike" cap="none" normalizeH="0" baseline="0" dirty="0">
+                <a:ln>
+                  <a:noFill/>
+                </a:ln>
+                <a:solidFill>
+                  <a:schemeClr val="tx1"/>
+                </a:solidFill>
+                <a:effectLst/>
+                <a:latin typeface="Arial" panose="020B0604020202020204" pitchFamily="34" charset="0"/>
+              </a:rPr>
+              <a:t>Loja física possui menor volume</a:t>
+            </a:r>
+            <a:r>
+              <a:rPr kumimoji="0" lang="pt-BR" altLang="pt-BR" sz="2400" b="0" i="0" u="none" strike="noStrike" cap="none" normalizeH="0" baseline="0" dirty="0">
+                <a:ln>
+                  <a:noFill/>
+                </a:ln>
+                <a:solidFill>
+                  <a:schemeClr val="tx1"/>
+                </a:solidFill>
+                <a:effectLst/>
+                <a:latin typeface="Arial" panose="020B0604020202020204" pitchFamily="34" charset="0"/>
+              </a:rPr>
+              <a:t>, indicando oportunidade de expansão digital.</a:t>
+            </a:r>
+            <a:br>
+              <a:rPr kumimoji="0" lang="pt-BR" altLang="pt-BR" sz="2400" b="0" i="0" u="none" strike="noStrike" cap="none" normalizeH="0" baseline="0" dirty="0">
+                <a:ln>
+                  <a:noFill/>
+                </a:ln>
+                <a:solidFill>
+                  <a:schemeClr val="tx1"/>
+                </a:solidFill>
+                <a:effectLst/>
+                <a:latin typeface="Arial" panose="020B0604020202020204" pitchFamily="34" charset="0"/>
+              </a:rPr>
+            </a:br>
+            <a:endParaRPr kumimoji="0" lang="pt-BR" altLang="pt-BR" sz="2400" b="0" i="0" u="none" strike="noStrike" cap="none" normalizeH="0" baseline="0" dirty="0">
+              <a:ln>
+                <a:noFill/>
+              </a:ln>
+              <a:solidFill>
+                <a:schemeClr val="tx1"/>
+              </a:solidFill>
+              <a:effectLst/>
+              <a:latin typeface="Arial" panose="020B0604020202020204" pitchFamily="34" charset="0"/>
+            </a:endParaRPr>
+          </a:p>
+          <a:p>
+            <a:pPr marR="0" lvl="0" algn="l" defTabSz="914400" rtl="0" eaLnBrk="0" fontAlgn="base" latinLnBrk="0" hangingPunct="0">
+              <a:lnSpc>
+                <a:spcPct val="100000"/>
+              </a:lnSpc>
+              <a:spcBef>
+                <a:spcPct val="0"/>
+              </a:spcBef>
+              <a:spcAft>
+                <a:spcPct val="0"/>
+              </a:spcAft>
+              <a:buClrTx/>
+              <a:buSzTx/>
+              <a:buFont typeface="Wingdings" panose="05000000000000000000" pitchFamily="2" charset="2"/>
+              <a:buChar char="§"/>
+              <a:tabLst/>
+            </a:pPr>
+            <a:r>
+              <a:rPr kumimoji="0" lang="pt-BR" altLang="pt-BR" sz="2400" b="1" i="0" u="none" strike="noStrike" cap="none" normalizeH="0" baseline="0" dirty="0">
+                <a:ln>
+                  <a:noFill/>
+                </a:ln>
+                <a:solidFill>
+                  <a:schemeClr val="tx1"/>
+                </a:solidFill>
+                <a:effectLst/>
+                <a:latin typeface="Arial" panose="020B0604020202020204" pitchFamily="34" charset="0"/>
+              </a:rPr>
+              <a:t>Picos de faturamento em setembro e novembro</a:t>
+            </a:r>
+            <a:r>
+              <a:rPr kumimoji="0" lang="pt-BR" altLang="pt-BR" sz="2400" b="0" i="0" u="none" strike="noStrike" cap="none" normalizeH="0" baseline="0" dirty="0">
+                <a:ln>
+                  <a:noFill/>
+                </a:ln>
+                <a:solidFill>
+                  <a:schemeClr val="tx1"/>
+                </a:solidFill>
+                <a:effectLst/>
+                <a:latin typeface="Arial" panose="020B0604020202020204" pitchFamily="34" charset="0"/>
+              </a:rPr>
+              <a:t>, sugerindo possível sazonalidade.</a:t>
+            </a:r>
+          </a:p>
+        </p:txBody>
+      </p:sp>
+      <p:sp>
+        <p:nvSpPr>
+          <p:cNvPr id="5" name="CaixaDeTexto 4">
+            <a:extLst>
+              <a:ext uri="{FF2B5EF4-FFF2-40B4-BE49-F238E27FC236}">
+                <a16:creationId xmlns:a16="http://schemas.microsoft.com/office/drawing/2014/main" id="{366F4D1E-7E91-3D9A-AED9-B9AC8473FB5B}"/>
+              </a:ext>
+            </a:extLst>
+          </p:cNvPr>
+          <p:cNvSpPr txBox="1"/>
+          <p:nvPr/>
+        </p:nvSpPr>
+        <p:spPr>
+          <a:xfrm>
+            <a:off x="1357532" y="5572035"/>
+            <a:ext cx="10529667" cy="830997"/>
+          </a:xfrm>
+          <a:prstGeom prst="rect">
+            <a:avLst/>
+          </a:prstGeom>
+          <a:noFill/>
+        </p:spPr>
+        <p:txBody>
+          <a:bodyPr wrap="square" rtlCol="0">
+            <a:spAutoFit/>
+          </a:bodyPr>
+          <a:lstStyle/>
+          <a:p>
+            <a:pPr algn="ctr"/>
+            <a:r>
+              <a:rPr lang="pt-BR" sz="2400" b="1" dirty="0">
+                <a:latin typeface="Arial" panose="020B0604020202020204" pitchFamily="34" charset="0"/>
+                <a:cs typeface="Arial" panose="020B0604020202020204" pitchFamily="34" charset="0"/>
+              </a:rPr>
+              <a:t>A análise demonstra como dados estruturados podem orientar decisões comerciais e estratégias de crescimento.</a:t>
+            </a:r>
           </a:p>
         </p:txBody>
       </p:sp>
     </p:spTree>
     <p:extLst>
       <p:ext uri="{BB962C8B-B14F-4D97-AF65-F5344CB8AC3E}">
-        <p14:creationId xmlns:p14="http://schemas.microsoft.com/office/powerpoint/2010/main" val="3961953047"/>
+        <p14:creationId xmlns:p14="http://schemas.microsoft.com/office/powerpoint/2010/main" val="179670078"/>
       </p:ext>
     </p:extLst>
   </p:cSld>
@@ -4279,6 +4553,398 @@
           <p:cNvPr id="2" name="Título 1">
             <a:extLst>
               <a:ext uri="{FF2B5EF4-FFF2-40B4-BE49-F238E27FC236}">
+                <a16:creationId xmlns:a16="http://schemas.microsoft.com/office/drawing/2014/main" id="{704E641E-BCAF-C981-2CF1-6784B87C7F5D}"/>
+              </a:ext>
+            </a:extLst>
+          </p:cNvPr>
+          <p:cNvSpPr>
+            <a:spLocks noGrp="1"/>
+          </p:cNvSpPr>
+          <p:nvPr>
+            <p:ph type="title"/>
+          </p:nvPr>
+        </p:nvSpPr>
+        <p:spPr>
+          <a:xfrm>
+            <a:off x="1371600" y="685800"/>
+            <a:ext cx="2919046" cy="763172"/>
+          </a:xfrm>
+        </p:spPr>
+        <p:txBody>
+          <a:bodyPr>
+            <a:noAutofit/>
+          </a:bodyPr>
+          <a:lstStyle/>
+          <a:p>
+            <a:r>
+              <a:rPr lang="pt-BR" sz="3200" dirty="0">
+                <a:latin typeface="Arial" panose="020B0604020202020204" pitchFamily="34" charset="0"/>
+                <a:cs typeface="Arial" panose="020B0604020202020204" pitchFamily="34" charset="0"/>
+              </a:rPr>
+              <a:t>Conclusão</a:t>
+            </a:r>
+            <a:endParaRPr lang="pt-BR" sz="4000" dirty="0">
+              <a:latin typeface="Arial" panose="020B0604020202020204" pitchFamily="34" charset="0"/>
+              <a:cs typeface="Arial" panose="020B0604020202020204" pitchFamily="34" charset="0"/>
+            </a:endParaRPr>
+          </a:p>
+        </p:txBody>
+      </p:sp>
+      <p:sp>
+        <p:nvSpPr>
+          <p:cNvPr id="3" name="Espaço Reservado para Conteúdo 2">
+            <a:extLst>
+              <a:ext uri="{FF2B5EF4-FFF2-40B4-BE49-F238E27FC236}">
+                <a16:creationId xmlns:a16="http://schemas.microsoft.com/office/drawing/2014/main" id="{81E2BE94-26CB-24DC-5EB2-0ABE8E5E8D4E}"/>
+              </a:ext>
+            </a:extLst>
+          </p:cNvPr>
+          <p:cNvSpPr>
+            <a:spLocks noGrp="1"/>
+          </p:cNvSpPr>
+          <p:nvPr>
+            <p:ph idx="1"/>
+          </p:nvPr>
+        </p:nvSpPr>
+        <p:spPr>
+          <a:xfrm>
+            <a:off x="1371600" y="2046849"/>
+            <a:ext cx="9601200" cy="2876843"/>
+          </a:xfrm>
+        </p:spPr>
+        <p:txBody>
+          <a:bodyPr>
+            <a:normAutofit/>
+          </a:bodyPr>
+          <a:lstStyle/>
+          <a:p>
+            <a:pPr marL="0" indent="0" algn="ctr">
+              <a:buNone/>
+            </a:pPr>
+            <a:r>
+              <a:rPr lang="pt-BR" sz="2400" dirty="0">
+                <a:latin typeface="Arial" panose="020B0604020202020204" pitchFamily="34" charset="0"/>
+                <a:cs typeface="Arial" panose="020B0604020202020204" pitchFamily="34" charset="0"/>
+              </a:rPr>
+              <a:t>O projeto demonstra na prática o processo completo de análise de dados: da estruturação no banco relacional à geração de insights de negócio com Python.</a:t>
+            </a:r>
+            <a:br>
+              <a:rPr lang="pt-BR" sz="2400" dirty="0">
+                <a:latin typeface="Arial" panose="020B0604020202020204" pitchFamily="34" charset="0"/>
+                <a:cs typeface="Arial" panose="020B0604020202020204" pitchFamily="34" charset="0"/>
+              </a:rPr>
+            </a:br>
+            <a:endParaRPr lang="pt-BR" sz="2400" dirty="0">
+              <a:latin typeface="Arial" panose="020B0604020202020204" pitchFamily="34" charset="0"/>
+              <a:cs typeface="Arial" panose="020B0604020202020204" pitchFamily="34" charset="0"/>
+            </a:endParaRPr>
+          </a:p>
+          <a:p>
+            <a:pPr marL="0" indent="0" algn="ctr">
+              <a:buNone/>
+            </a:pPr>
+            <a:r>
+              <a:rPr lang="pt-BR" sz="2400" dirty="0">
+                <a:latin typeface="Arial" panose="020B0604020202020204" pitchFamily="34" charset="0"/>
+                <a:cs typeface="Arial" panose="020B0604020202020204" pitchFamily="34" charset="0"/>
+              </a:rPr>
+              <a:t>A análise permitiu transformar dados de vendas em indicadores claros de desempenho, auxiliando na identificação de oportunidades de crescimento e melhoria operacional.</a:t>
+            </a:r>
+          </a:p>
+        </p:txBody>
+      </p:sp>
+    </p:spTree>
+    <p:extLst>
+      <p:ext uri="{BB962C8B-B14F-4D97-AF65-F5344CB8AC3E}">
+        <p14:creationId xmlns:p14="http://schemas.microsoft.com/office/powerpoint/2010/main" val="3961953047"/>
+      </p:ext>
+    </p:extLst>
+  </p:cSld>
+  <p:clrMapOvr>
+    <a:masterClrMapping/>
+  </p:clrMapOvr>
+</p:sld>
+</file>
+
+<file path=ppt/slides/slide13.xml><?xml version="1.0" encoding="utf-8"?>
+<p:sld xmlns:a="http://schemas.openxmlformats.org/drawingml/2006/main" xmlns:r="http://schemas.openxmlformats.org/officeDocument/2006/relationships" xmlns:p="http://schemas.openxmlformats.org/presentationml/2006/main">
+  <p:cSld>
+    <p:spTree>
+      <p:nvGrpSpPr>
+        <p:cNvPr id="1" name=""/>
+        <p:cNvGrpSpPr/>
+        <p:nvPr/>
+      </p:nvGrpSpPr>
+      <p:grpSpPr>
+        <a:xfrm>
+          <a:off x="0" y="0"/>
+          <a:ext cx="0" cy="0"/>
+          <a:chOff x="0" y="0"/>
+          <a:chExt cx="0" cy="0"/>
+        </a:xfrm>
+      </p:grpSpPr>
+      <p:sp>
+        <p:nvSpPr>
+          <p:cNvPr id="2" name="Título 1">
+            <a:extLst>
+              <a:ext uri="{FF2B5EF4-FFF2-40B4-BE49-F238E27FC236}">
+                <a16:creationId xmlns:a16="http://schemas.microsoft.com/office/drawing/2014/main" id="{1A0B0719-7159-CC9B-CE3E-E93A2D3719E8}"/>
+              </a:ext>
+            </a:extLst>
+          </p:cNvPr>
+          <p:cNvSpPr>
+            <a:spLocks noGrp="1"/>
+          </p:cNvSpPr>
+          <p:nvPr>
+            <p:ph type="title"/>
+          </p:nvPr>
+        </p:nvSpPr>
+        <p:spPr>
+          <a:xfrm>
+            <a:off x="1024890" y="348175"/>
+            <a:ext cx="9601200" cy="664698"/>
+          </a:xfrm>
+        </p:spPr>
+        <p:txBody>
+          <a:bodyPr>
+            <a:normAutofit/>
+          </a:bodyPr>
+          <a:lstStyle/>
+          <a:p>
+            <a:r>
+              <a:rPr lang="pt-BR" sz="3200" dirty="0">
+                <a:latin typeface="Arial" panose="020B0604020202020204" pitchFamily="34" charset="0"/>
+                <a:cs typeface="Arial" panose="020B0604020202020204" pitchFamily="34" charset="0"/>
+              </a:rPr>
+              <a:t>Stack Técnica</a:t>
+            </a:r>
+          </a:p>
+        </p:txBody>
+      </p:sp>
+      <p:sp>
+        <p:nvSpPr>
+          <p:cNvPr id="5" name="CaixaDeTexto 4">
+            <a:extLst>
+              <a:ext uri="{FF2B5EF4-FFF2-40B4-BE49-F238E27FC236}">
+                <a16:creationId xmlns:a16="http://schemas.microsoft.com/office/drawing/2014/main" id="{1FE923D5-0D8F-E8EE-67EF-BF26D71D5D4B}"/>
+              </a:ext>
+            </a:extLst>
+          </p:cNvPr>
+          <p:cNvSpPr txBox="1"/>
+          <p:nvPr/>
+        </p:nvSpPr>
+        <p:spPr>
+          <a:xfrm>
+            <a:off x="860473" y="1667106"/>
+            <a:ext cx="6196818" cy="461665"/>
+          </a:xfrm>
+          <a:prstGeom prst="rect">
+            <a:avLst/>
+          </a:prstGeom>
+          <a:noFill/>
+        </p:spPr>
+        <p:txBody>
+          <a:bodyPr wrap="square">
+            <a:spAutoFit/>
+          </a:bodyPr>
+          <a:lstStyle/>
+          <a:p>
+            <a:pPr>
+              <a:buNone/>
+            </a:pPr>
+            <a:r>
+              <a:rPr lang="pt-BR" sz="2400" b="1" dirty="0">
+                <a:latin typeface="Arial" panose="020B0604020202020204" pitchFamily="34" charset="0"/>
+                <a:cs typeface="Arial" panose="020B0604020202020204" pitchFamily="34" charset="0"/>
+              </a:rPr>
+              <a:t>Banco de Dados: </a:t>
+            </a:r>
+            <a:r>
+              <a:rPr lang="pt-BR" sz="2400" dirty="0">
+                <a:latin typeface="Arial" panose="020B0604020202020204" pitchFamily="34" charset="0"/>
+                <a:cs typeface="Arial" panose="020B0604020202020204" pitchFamily="34" charset="0"/>
+              </a:rPr>
+              <a:t>PostgreSQL, MySQL</a:t>
+            </a:r>
+          </a:p>
+        </p:txBody>
+      </p:sp>
+      <p:sp>
+        <p:nvSpPr>
+          <p:cNvPr id="7" name="CaixaDeTexto 6">
+            <a:extLst>
+              <a:ext uri="{FF2B5EF4-FFF2-40B4-BE49-F238E27FC236}">
+                <a16:creationId xmlns:a16="http://schemas.microsoft.com/office/drawing/2014/main" id="{C416CFDC-1181-E3D9-6064-EFA27F3D0DA7}"/>
+              </a:ext>
+            </a:extLst>
+          </p:cNvPr>
+          <p:cNvSpPr txBox="1"/>
+          <p:nvPr/>
+        </p:nvSpPr>
+        <p:spPr>
+          <a:xfrm>
+            <a:off x="860473" y="2519179"/>
+            <a:ext cx="8621152" cy="461665"/>
+          </a:xfrm>
+          <a:prstGeom prst="rect">
+            <a:avLst/>
+          </a:prstGeom>
+          <a:noFill/>
+        </p:spPr>
+        <p:txBody>
+          <a:bodyPr wrap="square">
+            <a:spAutoFit/>
+          </a:bodyPr>
+          <a:lstStyle/>
+          <a:p>
+            <a:pPr>
+              <a:buNone/>
+            </a:pPr>
+            <a:r>
+              <a:rPr lang="pt-BR" sz="2400" b="1" dirty="0">
+                <a:latin typeface="Arial" panose="020B0604020202020204" pitchFamily="34" charset="0"/>
+                <a:cs typeface="Arial" panose="020B0604020202020204" pitchFamily="34" charset="0"/>
+              </a:rPr>
+              <a:t>Análise de Dados: </a:t>
+            </a:r>
+            <a:r>
+              <a:rPr lang="pt-BR" sz="2400" dirty="0">
+                <a:latin typeface="Arial" panose="020B0604020202020204" pitchFamily="34" charset="0"/>
+                <a:cs typeface="Arial" panose="020B0604020202020204" pitchFamily="34" charset="0"/>
+              </a:rPr>
+              <a:t>Python, Pandas, Matplotlib</a:t>
+            </a:r>
+          </a:p>
+        </p:txBody>
+      </p:sp>
+      <p:sp>
+        <p:nvSpPr>
+          <p:cNvPr id="10" name="CaixaDeTexto 9">
+            <a:extLst>
+              <a:ext uri="{FF2B5EF4-FFF2-40B4-BE49-F238E27FC236}">
+                <a16:creationId xmlns:a16="http://schemas.microsoft.com/office/drawing/2014/main" id="{16285214-8F9F-11DD-3DE9-752B285D914E}"/>
+              </a:ext>
+            </a:extLst>
+          </p:cNvPr>
+          <p:cNvSpPr txBox="1"/>
+          <p:nvPr/>
+        </p:nvSpPr>
+        <p:spPr>
+          <a:xfrm>
+            <a:off x="860473" y="4592711"/>
+            <a:ext cx="8813996" cy="461665"/>
+          </a:xfrm>
+          <a:prstGeom prst="rect">
+            <a:avLst/>
+          </a:prstGeom>
+          <a:noFill/>
+        </p:spPr>
+        <p:txBody>
+          <a:bodyPr wrap="square">
+            <a:spAutoFit/>
+          </a:bodyPr>
+          <a:lstStyle/>
+          <a:p>
+            <a:r>
+              <a:rPr lang="pt-BR" sz="2400" b="1" dirty="0">
+                <a:latin typeface="Arial" panose="020B0604020202020204" pitchFamily="34" charset="0"/>
+                <a:cs typeface="Arial" panose="020B0604020202020204" pitchFamily="34" charset="0"/>
+              </a:rPr>
+              <a:t>Ferramentas: </a:t>
+            </a:r>
+            <a:r>
+              <a:rPr lang="pt-BR" sz="2400" dirty="0">
+                <a:latin typeface="Arial" panose="020B0604020202020204" pitchFamily="34" charset="0"/>
+                <a:cs typeface="Arial" panose="020B0604020202020204" pitchFamily="34" charset="0"/>
+              </a:rPr>
+              <a:t>Google Colab, VS Code, Excel, Power BI</a:t>
+            </a:r>
+          </a:p>
+        </p:txBody>
+      </p:sp>
+      <p:sp>
+        <p:nvSpPr>
+          <p:cNvPr id="12" name="CaixaDeTexto 11">
+            <a:extLst>
+              <a:ext uri="{FF2B5EF4-FFF2-40B4-BE49-F238E27FC236}">
+                <a16:creationId xmlns:a16="http://schemas.microsoft.com/office/drawing/2014/main" id="{19004A9D-761F-16EF-C456-45CA8C0ED122}"/>
+              </a:ext>
+            </a:extLst>
+          </p:cNvPr>
+          <p:cNvSpPr txBox="1"/>
+          <p:nvPr/>
+        </p:nvSpPr>
+        <p:spPr>
+          <a:xfrm>
+            <a:off x="822960" y="3371279"/>
+            <a:ext cx="10005060" cy="830997"/>
+          </a:xfrm>
+          <a:prstGeom prst="rect">
+            <a:avLst/>
+          </a:prstGeom>
+          <a:noFill/>
+        </p:spPr>
+        <p:txBody>
+          <a:bodyPr wrap="square">
+            <a:spAutoFit/>
+          </a:bodyPr>
+          <a:lstStyle/>
+          <a:p>
+            <a:pPr>
+              <a:buNone/>
+            </a:pPr>
+            <a:r>
+              <a:rPr lang="pt-BR" sz="2400" b="1" dirty="0">
+                <a:latin typeface="Arial" panose="020B0604020202020204" pitchFamily="34" charset="0"/>
+                <a:cs typeface="Arial" panose="020B0604020202020204" pitchFamily="34" charset="0"/>
+              </a:rPr>
+              <a:t>Conceitos: </a:t>
+            </a:r>
+            <a:r>
+              <a:rPr lang="pt-BR" sz="2400" dirty="0">
+                <a:latin typeface="Arial" panose="020B0604020202020204" pitchFamily="34" charset="0"/>
+                <a:cs typeface="Arial" panose="020B0604020202020204" pitchFamily="34" charset="0"/>
+              </a:rPr>
+              <a:t>SQL Joins, Group By e funções de agregação, Análise exploratória de dados, Modelagem relacional</a:t>
+            </a:r>
+          </a:p>
+        </p:txBody>
+      </p:sp>
+    </p:spTree>
+    <p:extLst>
+      <p:ext uri="{BB962C8B-B14F-4D97-AF65-F5344CB8AC3E}">
+        <p14:creationId xmlns:p14="http://schemas.microsoft.com/office/powerpoint/2010/main" val="1262850240"/>
+      </p:ext>
+    </p:extLst>
+  </p:cSld>
+  <p:clrMapOvr>
+    <a:masterClrMapping/>
+  </p:clrMapOvr>
+</p:sld>
+</file>
+
+<file path=ppt/slides/slide14.xml><?xml version="1.0" encoding="utf-8"?>
+<p:sld xmlns:a="http://schemas.openxmlformats.org/drawingml/2006/main" xmlns:r="http://schemas.openxmlformats.org/officeDocument/2006/relationships" xmlns:p="http://schemas.openxmlformats.org/presentationml/2006/main">
+  <p:cSld>
+    <p:spTree>
+      <p:nvGrpSpPr>
+        <p:cNvPr id="1" name=""/>
+        <p:cNvGrpSpPr/>
+        <p:nvPr/>
+      </p:nvGrpSpPr>
+      <p:grpSpPr>
+        <a:xfrm>
+          <a:off x="0" y="0"/>
+          <a:ext cx="0" cy="0"/>
+          <a:chOff x="0" y="0"/>
+          <a:chExt cx="0" cy="0"/>
+        </a:xfrm>
+      </p:grpSpPr>
+      <p:sp>
+        <p:nvSpPr>
+          <p:cNvPr id="2" name="Título 1">
+            <a:extLst>
+              <a:ext uri="{FF2B5EF4-FFF2-40B4-BE49-F238E27FC236}">
                 <a16:creationId xmlns:a16="http://schemas.microsoft.com/office/drawing/2014/main" id="{80D67465-BC1E-60D8-61D1-E6C68FD39C7D}"/>
               </a:ext>
             </a:extLst>
@@ -4303,7 +4969,10 @@
           <a:lstStyle/>
           <a:p>
             <a:r>
-              <a:rPr lang="pt-BR" sz="4000" dirty="0"/>
+              <a:rPr lang="pt-BR" sz="4000" dirty="0">
+                <a:latin typeface="Arial" panose="020B0604020202020204" pitchFamily="34" charset="0"/>
+                <a:cs typeface="Arial" panose="020B0604020202020204" pitchFamily="34" charset="0"/>
+              </a:rPr>
               <a:t>Contato</a:t>
             </a:r>
           </a:p>
@@ -4328,7 +4997,7 @@
         <p:spPr>
           <a:xfrm>
             <a:off x="1371600" y="2053883"/>
-            <a:ext cx="4157003" cy="3813517"/>
+            <a:ext cx="5859194" cy="3813517"/>
           </a:xfrm>
         </p:spPr>
         <p:txBody>
@@ -4339,7 +5008,10 @@
               <a:buNone/>
             </a:pPr>
             <a:r>
-              <a:rPr lang="pt-BR" b="1" dirty="0"/>
+              <a:rPr lang="pt-BR" b="1" dirty="0">
+                <a:latin typeface="Arial" panose="020B0604020202020204" pitchFamily="34" charset="0"/>
+                <a:cs typeface="Arial" panose="020B0604020202020204" pitchFamily="34" charset="0"/>
+              </a:rPr>
               <a:t>E-mail</a:t>
             </a:r>
           </a:p>
@@ -4349,18 +5021,26 @@
             </a:pPr>
             <a:r>
               <a:rPr lang="pt-BR" dirty="0">
+                <a:latin typeface="Arial" panose="020B0604020202020204" pitchFamily="34" charset="0"/>
+                <a:cs typeface="Arial" panose="020B0604020202020204" pitchFamily="34" charset="0"/>
                 <a:hlinkClick r:id="rId2"/>
               </a:rPr>
               <a:t>halina.oliveira2021@gmail.com</a:t>
             </a:r>
-            <a:endParaRPr lang="pt-BR" dirty="0"/>
+            <a:endParaRPr lang="pt-BR" dirty="0">
+              <a:latin typeface="Arial" panose="020B0604020202020204" pitchFamily="34" charset="0"/>
+              <a:cs typeface="Arial" panose="020B0604020202020204" pitchFamily="34" charset="0"/>
+            </a:endParaRPr>
           </a:p>
           <a:p>
             <a:pPr marL="0" indent="0">
               <a:buNone/>
             </a:pPr>
             <a:r>
-              <a:rPr lang="pt-BR" b="1" dirty="0"/>
+              <a:rPr lang="pt-BR" b="1" dirty="0">
+                <a:latin typeface="Arial" panose="020B0604020202020204" pitchFamily="34" charset="0"/>
+                <a:cs typeface="Arial" panose="020B0604020202020204" pitchFamily="34" charset="0"/>
+              </a:rPr>
               <a:t>Celular</a:t>
             </a:r>
           </a:p>
@@ -4369,7 +5049,10 @@
               <a:buNone/>
             </a:pPr>
             <a:r>
-              <a:rPr lang="pt-BR" dirty="0"/>
+              <a:rPr lang="pt-BR" dirty="0">
+                <a:latin typeface="Arial" panose="020B0604020202020204" pitchFamily="34" charset="0"/>
+                <a:cs typeface="Arial" panose="020B0604020202020204" pitchFamily="34" charset="0"/>
+              </a:rPr>
               <a:t>(34)99803-6421</a:t>
             </a:r>
           </a:p>
@@ -4378,7 +5061,10 @@
               <a:buNone/>
             </a:pPr>
             <a:r>
-              <a:rPr lang="pt-BR" b="1" dirty="0"/>
+              <a:rPr lang="pt-BR" b="1" dirty="0">
+                <a:latin typeface="Arial" panose="020B0604020202020204" pitchFamily="34" charset="0"/>
+                <a:cs typeface="Arial" panose="020B0604020202020204" pitchFamily="34" charset="0"/>
+              </a:rPr>
               <a:t>Linkedin</a:t>
             </a:r>
           </a:p>
@@ -4387,23 +5073,34 @@
               <a:buNone/>
             </a:pPr>
             <a:r>
-              <a:rPr lang="pt-BR" dirty="0"/>
+              <a:rPr lang="pt-BR" dirty="0">
+                <a:latin typeface="Arial" panose="020B0604020202020204" pitchFamily="34" charset="0"/>
+                <a:cs typeface="Arial" panose="020B0604020202020204" pitchFamily="34" charset="0"/>
+              </a:rPr>
               <a:t> </a:t>
             </a:r>
             <a:r>
               <a:rPr lang="pt-BR" dirty="0">
+                <a:latin typeface="Arial" panose="020B0604020202020204" pitchFamily="34" charset="0"/>
+                <a:cs typeface="Arial" panose="020B0604020202020204" pitchFamily="34" charset="0"/>
                 <a:hlinkClick r:id="rId3"/>
               </a:rPr>
               <a:t>www.linkedin.com/in/halina-oliveira</a:t>
             </a:r>
-            <a:endParaRPr lang="pt-BR" dirty="0"/>
+            <a:endParaRPr lang="pt-BR" dirty="0">
+              <a:latin typeface="Arial" panose="020B0604020202020204" pitchFamily="34" charset="0"/>
+              <a:cs typeface="Arial" panose="020B0604020202020204" pitchFamily="34" charset="0"/>
+            </a:endParaRPr>
           </a:p>
           <a:p>
             <a:pPr marL="0" indent="0">
               <a:buNone/>
             </a:pPr>
             <a:r>
-              <a:rPr lang="pt-BR" b="1" dirty="0"/>
+              <a:rPr lang="pt-BR" b="1" dirty="0">
+                <a:latin typeface="Arial" panose="020B0604020202020204" pitchFamily="34" charset="0"/>
+                <a:cs typeface="Arial" panose="020B0604020202020204" pitchFamily="34" charset="0"/>
+              </a:rPr>
               <a:t>GitHub</a:t>
             </a:r>
           </a:p>
@@ -4413,11 +5110,16 @@
             </a:pPr>
             <a:r>
               <a:rPr lang="pt-BR" dirty="0">
+                <a:latin typeface="Arial" panose="020B0604020202020204" pitchFamily="34" charset="0"/>
+                <a:cs typeface="Arial" panose="020B0604020202020204" pitchFamily="34" charset="0"/>
                 <a:hlinkClick r:id="rId4"/>
               </a:rPr>
               <a:t>github.com/Halina23</a:t>
             </a:r>
-            <a:endParaRPr lang="pt-BR" dirty="0"/>
+            <a:endParaRPr lang="pt-BR" dirty="0">
+              <a:latin typeface="Arial" panose="020B0604020202020204" pitchFamily="34" charset="0"/>
+              <a:cs typeface="Arial" panose="020B0604020202020204" pitchFamily="34" charset="0"/>
+            </a:endParaRPr>
           </a:p>
         </p:txBody>
       </p:sp>
@@ -4500,7 +5202,7 @@
         <p:spPr>
           <a:xfrm>
             <a:off x="1371599" y="2345788"/>
-            <a:ext cx="6450037" cy="3281289"/>
+            <a:ext cx="6450037" cy="2320221"/>
           </a:xfrm>
         </p:spPr>
         <p:txBody>
@@ -4510,8 +5212,11 @@
           <a:lstStyle/>
           <a:p>
             <a:r>
-              <a:rPr lang="pt-BR" sz="2400" dirty="0"/>
-              <a:t>Tenho 26 anos, atualmente moro em Uberlândia/MG. Sou apaixonada por tecnologia, movida pela curiosidade de entender como os sistemas funcionam e sempre disposta a contribuir ativamente na solução de problemas. Tenho perfil proativo, analítico e colaborativo, buscando constantemente evolução técnica e profissional.</a:t>
+              <a:rPr lang="pt-BR" sz="2400" dirty="0">
+                <a:latin typeface="Arial" panose="020B0604020202020204" pitchFamily="34" charset="0"/>
+                <a:cs typeface="Arial" panose="020B0604020202020204" pitchFamily="34" charset="0"/>
+              </a:rPr>
+              <a:t>Estudante de Banco de Dados com foco em análise de dados e SQL. Desenvolvo projetos próprios utilizando PostgreSQL, Python e ferramentas de análise para explorar dados de vendas, identificar padrões e gerar insights de negócio.</a:t>
             </a:r>
           </a:p>
         </p:txBody>
@@ -4559,8 +5264,8 @@
         </p:nvSpPr>
         <p:spPr>
           <a:xfrm>
-            <a:off x="1371600" y="697134"/>
-            <a:ext cx="3221502" cy="646331"/>
+            <a:off x="1371599" y="683933"/>
+            <a:ext cx="3221502" cy="584775"/>
           </a:xfrm>
           <a:prstGeom prst="rect">
             <a:avLst/>
@@ -4574,7 +5279,10 @@
           <a:lstStyle/>
           <a:p>
             <a:r>
-              <a:rPr lang="pt-BR" sz="3600" dirty="0"/>
+              <a:rPr lang="pt-BR" sz="3200" dirty="0">
+                <a:latin typeface="Arial" panose="020B0604020202020204" pitchFamily="34" charset="0"/>
+                <a:cs typeface="Arial" panose="020B0604020202020204" pitchFamily="34" charset="0"/>
+              </a:rPr>
               <a:t>Halina Oliveira</a:t>
             </a:r>
           </a:p>
@@ -4609,10 +5317,16 @@
           <a:lstStyle/>
           <a:p>
             <a:r>
-              <a:rPr lang="pt-BR" sz="2400" b="1" dirty="0"/>
+              <a:rPr lang="pt-BR" sz="2400" b="1" dirty="0">
+                <a:latin typeface="Arial" panose="020B0604020202020204" pitchFamily="34" charset="0"/>
+                <a:cs typeface="Arial" panose="020B0604020202020204" pitchFamily="34" charset="0"/>
+              </a:rPr>
               <a:t>Sobre Mim</a:t>
             </a:r>
-            <a:endParaRPr lang="pt-BR" sz="2400" dirty="0"/>
+            <a:endParaRPr lang="pt-BR" sz="2400" dirty="0">
+              <a:latin typeface="Arial" panose="020B0604020202020204" pitchFamily="34" charset="0"/>
+              <a:cs typeface="Arial" panose="020B0604020202020204" pitchFamily="34" charset="0"/>
+            </a:endParaRPr>
           </a:p>
         </p:txBody>
       </p:sp>
@@ -4664,21 +5378,23 @@
         </p:nvSpPr>
         <p:spPr>
           <a:xfrm>
-            <a:off x="780756" y="372289"/>
-            <a:ext cx="2046849" cy="524022"/>
+            <a:off x="780756" y="391010"/>
+            <a:ext cx="5831058" cy="524022"/>
           </a:xfrm>
         </p:spPr>
         <p:txBody>
           <a:bodyPr>
-            <a:normAutofit fontScale="90000"/>
+            <a:noAutofit/>
           </a:bodyPr>
           <a:lstStyle/>
           <a:p>
             <a:r>
-              <a:rPr lang="pt-BR" sz="3200" dirty="0"/>
+              <a:rPr lang="pt-BR" sz="3200" dirty="0">
+                <a:latin typeface="Arial" panose="020B0604020202020204" pitchFamily="34" charset="0"/>
+                <a:cs typeface="Arial" panose="020B0604020202020204" pitchFamily="34" charset="0"/>
+              </a:rPr>
               <a:t>Educação</a:t>
             </a:r>
-            <a:endParaRPr lang="pt-BR" dirty="0"/>
           </a:p>
         </p:txBody>
       </p:sp>
@@ -4700,8 +5416,8 @@
         </p:nvSpPr>
         <p:spPr bwMode="auto">
           <a:xfrm>
-            <a:off x="780757" y="1980131"/>
-            <a:ext cx="5831058" cy="1403461"/>
+            <a:off x="780756" y="1781772"/>
+            <a:ext cx="5831058" cy="960263"/>
           </a:xfrm>
           <a:prstGeom prst="rect">
             <a:avLst/>
@@ -4753,20 +5469,12 @@
               <a:buNone/>
             </a:pPr>
             <a:r>
-              <a:rPr lang="pt-BR" dirty="0"/>
-              <a:t>Tecnólogo em Banco de Dados – Universidade </a:t>
-            </a:r>
-            <a:r>
-              <a:rPr lang="pt-BR" dirty="0" err="1"/>
-              <a:t>Unicesumar</a:t>
-            </a:r>
-            <a:r>
-              <a:rPr lang="pt-BR" dirty="0"/>
-              <a:t> (2025–2027) Cursando – foco em administração, modelagem e segurança de dados</a:t>
-            </a:r>
-          </a:p>
-          <a:p>
-            <a:endParaRPr lang="pt-BR" dirty="0"/>
+              <a:rPr lang="pt-BR" dirty="0">
+                <a:latin typeface="Arial" panose="020B0604020202020204" pitchFamily="34" charset="0"/>
+                <a:cs typeface="Arial" panose="020B0604020202020204" pitchFamily="34" charset="0"/>
+              </a:rPr>
+              <a:t>Graduação em Banco de Dados – Universidade Unicesumar (2025–2027) Cursando – foco em administração, modelagem e segurança de dados</a:t>
+            </a:r>
           </a:p>
         </p:txBody>
       </p:sp>
@@ -4816,8 +5524,8 @@
         </p:nvSpPr>
         <p:spPr>
           <a:xfrm>
-            <a:off x="780757" y="3639959"/>
-            <a:ext cx="3868615" cy="646331"/>
+            <a:off x="780756" y="3559753"/>
+            <a:ext cx="6886135" cy="1323439"/>
           </a:xfrm>
           <a:prstGeom prst="rect">
             <a:avLst/>
@@ -4831,49 +5539,34 @@
           <a:lstStyle/>
           <a:p>
             <a:r>
-              <a:rPr lang="pt-BR" dirty="0"/>
-              <a:t>Fundamentos e Administração de Banco de Dados – </a:t>
-            </a:r>
-            <a:r>
-              <a:rPr lang="pt-BR" dirty="0" err="1"/>
-              <a:t>Udemy</a:t>
-            </a:r>
-            <a:endParaRPr lang="pt-BR" dirty="0"/>
-          </a:p>
-        </p:txBody>
-      </p:sp>
-      <p:sp>
-        <p:nvSpPr>
-          <p:cNvPr id="8" name="CaixaDeTexto 7">
-            <a:extLst>
-              <a:ext uri="{FF2B5EF4-FFF2-40B4-BE49-F238E27FC236}">
-                <a16:creationId xmlns:a16="http://schemas.microsoft.com/office/drawing/2014/main" id="{235C49C6-1545-BA93-7372-203448052582}"/>
-              </a:ext>
-            </a:extLst>
-          </p:cNvPr>
-          <p:cNvSpPr txBox="1"/>
-          <p:nvPr/>
-        </p:nvSpPr>
-        <p:spPr>
-          <a:xfrm>
-            <a:off x="780756" y="5093312"/>
-            <a:ext cx="3868615" cy="646331"/>
-          </a:xfrm>
-          <a:prstGeom prst="rect">
-            <a:avLst/>
-          </a:prstGeom>
-          <a:noFill/>
-        </p:spPr>
-        <p:txBody>
-          <a:bodyPr wrap="square" rtlCol="0">
-            <a:spAutoFit/>
-          </a:bodyPr>
-          <a:lstStyle/>
-          <a:p>
-            <a:r>
-              <a:rPr lang="pt-BR" dirty="0"/>
-              <a:t>Fundamentos de Ciência de Dados – Hashtag Treinamentos</a:t>
-            </a:r>
+              <a:rPr lang="pt-BR" sz="2000" dirty="0"/>
+              <a:t>• Fundamentos de Ciência de Dados — Hashtag Treinamentos</a:t>
+            </a:r>
+            <a:br>
+              <a:rPr lang="pt-BR" sz="2000" dirty="0"/>
+            </a:br>
+            <a:r>
+              <a:rPr lang="pt-BR" sz="2000" dirty="0"/>
+              <a:t>• Introdução à Ciência de Dados — Santander Academy</a:t>
+            </a:r>
+            <a:br>
+              <a:rPr lang="pt-BR" sz="2000" dirty="0"/>
+            </a:br>
+            <a:r>
+              <a:rPr lang="pt-BR" sz="2000" dirty="0"/>
+              <a:t>• Power BI — Santander Academy</a:t>
+            </a:r>
+            <a:br>
+              <a:rPr lang="pt-BR" sz="2000" dirty="0"/>
+            </a:br>
+            <a:r>
+              <a:rPr lang="pt-BR" sz="2000" dirty="0"/>
+              <a:t>• Fundamentos e Administração de Banco de Dados — Udemy</a:t>
+            </a:r>
+            <a:endParaRPr lang="pt-BR" sz="2000" dirty="0">
+              <a:latin typeface="Arial" panose="020B0604020202020204" pitchFamily="34" charset="0"/>
+              <a:cs typeface="Arial" panose="020B0604020202020204" pitchFamily="34" charset="0"/>
+            </a:endParaRPr>
           </a:p>
         </p:txBody>
       </p:sp>
@@ -4891,8 +5584,8 @@
         </p:nvSpPr>
         <p:spPr>
           <a:xfrm>
-            <a:off x="780757" y="1441522"/>
-            <a:ext cx="1533048" cy="461665"/>
+            <a:off x="780756" y="1262100"/>
+            <a:ext cx="1705916" cy="461665"/>
           </a:xfrm>
           <a:prstGeom prst="rect">
             <a:avLst/>
@@ -4906,10 +5599,16 @@
           <a:lstStyle/>
           <a:p>
             <a:r>
-              <a:rPr lang="pt-BR" sz="2400" b="1" dirty="0"/>
+              <a:rPr lang="pt-BR" sz="2400" b="1" dirty="0">
+                <a:latin typeface="Arial" panose="020B0604020202020204" pitchFamily="34" charset="0"/>
+                <a:cs typeface="Arial" panose="020B0604020202020204" pitchFamily="34" charset="0"/>
+              </a:rPr>
               <a:t>Faculdade</a:t>
             </a:r>
-            <a:endParaRPr lang="pt-BR" b="1" dirty="0"/>
+            <a:endParaRPr lang="pt-BR" b="1" dirty="0">
+              <a:latin typeface="Arial" panose="020B0604020202020204" pitchFamily="34" charset="0"/>
+              <a:cs typeface="Arial" panose="020B0604020202020204" pitchFamily="34" charset="0"/>
+            </a:endParaRPr>
           </a:p>
         </p:txBody>
       </p:sp>
@@ -4927,8 +5626,8 @@
         </p:nvSpPr>
         <p:spPr>
           <a:xfrm>
-            <a:off x="780757" y="3229703"/>
-            <a:ext cx="3375348" cy="461665"/>
+            <a:off x="780756" y="2960164"/>
+            <a:ext cx="3829895" cy="461665"/>
           </a:xfrm>
           <a:prstGeom prst="rect">
             <a:avLst/>
@@ -4942,42 +5641,10 @@
           <a:lstStyle/>
           <a:p>
             <a:r>
-              <a:rPr lang="pt-BR" sz="2400" b="1" dirty="0"/>
-              <a:t>Cursos Complementares</a:t>
-            </a:r>
-          </a:p>
-        </p:txBody>
-      </p:sp>
-      <p:sp>
-        <p:nvSpPr>
-          <p:cNvPr id="11" name="CaixaDeTexto 10">
-            <a:extLst>
-              <a:ext uri="{FF2B5EF4-FFF2-40B4-BE49-F238E27FC236}">
-                <a16:creationId xmlns:a16="http://schemas.microsoft.com/office/drawing/2014/main" id="{E87FFB69-CC96-0D8F-F6FF-74AECE1B1F72}"/>
-              </a:ext>
-            </a:extLst>
-          </p:cNvPr>
-          <p:cNvSpPr txBox="1"/>
-          <p:nvPr/>
-        </p:nvSpPr>
-        <p:spPr>
-          <a:xfrm>
-            <a:off x="780757" y="4578809"/>
-            <a:ext cx="3375348" cy="461665"/>
-          </a:xfrm>
-          <a:prstGeom prst="rect">
-            <a:avLst/>
-          </a:prstGeom>
-          <a:noFill/>
-        </p:spPr>
-        <p:txBody>
-          <a:bodyPr wrap="none" rtlCol="0">
-            <a:spAutoFit/>
-          </a:bodyPr>
-          <a:lstStyle/>
-          <a:p>
-            <a:r>
-              <a:rPr lang="pt-BR" sz="2400" b="1" dirty="0"/>
+              <a:rPr lang="pt-BR" sz="2400" b="1" dirty="0">
+                <a:latin typeface="Arial" panose="020B0604020202020204" pitchFamily="34" charset="0"/>
+                <a:cs typeface="Arial" panose="020B0604020202020204" pitchFamily="34" charset="0"/>
+              </a:rPr>
               <a:t>Cursos Complementares</a:t>
             </a:r>
           </a:p>
@@ -5061,16 +5728,21 @@
         </p:nvSpPr>
         <p:spPr>
           <a:xfrm>
-            <a:off x="8618809" y="2665828"/>
-            <a:ext cx="2848708" cy="763172"/>
-          </a:xfrm>
-        </p:spPr>
-        <p:txBody>
-          <a:bodyPr/>
+            <a:off x="1148865" y="953963"/>
+            <a:ext cx="4126520" cy="490611"/>
+          </a:xfrm>
+        </p:spPr>
+        <p:txBody>
+          <a:bodyPr>
+            <a:noAutofit/>
+          </a:bodyPr>
           <a:lstStyle/>
           <a:p>
             <a:r>
-              <a:rPr lang="pt-BR" dirty="0"/>
+              <a:rPr lang="pt-BR" sz="3200" dirty="0">
+                <a:latin typeface="Arial" panose="020B0604020202020204" pitchFamily="34" charset="0"/>
+                <a:cs typeface="Arial" panose="020B0604020202020204" pitchFamily="34" charset="0"/>
+              </a:rPr>
               <a:t>Hard Skills</a:t>
             </a:r>
           </a:p>
@@ -5094,43 +5766,308 @@
         </p:nvSpPr>
         <p:spPr>
           <a:xfrm>
-            <a:off x="1343462" y="1329397"/>
-            <a:ext cx="5732587" cy="4593101"/>
+            <a:off x="1019905" y="1772530"/>
+            <a:ext cx="4593104" cy="4234376"/>
           </a:xfrm>
         </p:spPr>
         <p:txBody>
           <a:bodyPr>
-            <a:normAutofit/>
+            <a:normAutofit lnSpcReduction="10000"/>
           </a:bodyPr>
           <a:lstStyle/>
           <a:p>
-            <a:r>
-              <a:rPr lang="pt-BR" sz="2800" dirty="0"/>
+            <a:pPr marL="342900" indent="-342900" defTabSz="457200">
+              <a:buFont typeface="Wingdings" panose="05000000000000000000" pitchFamily="2" charset="2"/>
+              <a:buChar char="§"/>
+            </a:pPr>
+            <a:r>
+              <a:rPr lang="pt-BR" sz="2400" dirty="0">
+                <a:solidFill>
+                  <a:schemeClr val="tx1"/>
+                </a:solidFill>
+                <a:latin typeface="Arial" panose="020B0604020202020204" pitchFamily="34" charset="0"/>
+                <a:cs typeface="Arial" panose="020B0604020202020204" pitchFamily="34" charset="0"/>
+              </a:rPr>
               <a:t>Criação e manutenção de bancos de dados relacionais</a:t>
             </a:r>
-          </a:p>
-          <a:p>
-            <a:r>
-              <a:rPr lang="pt-BR" sz="2800" dirty="0"/>
+            <a:br>
+              <a:rPr lang="pt-BR" sz="2400" dirty="0">
+                <a:solidFill>
+                  <a:schemeClr val="tx1"/>
+                </a:solidFill>
+                <a:latin typeface="Arial" panose="020B0604020202020204" pitchFamily="34" charset="0"/>
+                <a:cs typeface="Arial" panose="020B0604020202020204" pitchFamily="34" charset="0"/>
+              </a:rPr>
+            </a:br>
+            <a:endParaRPr lang="pt-BR" sz="2400" dirty="0">
+              <a:solidFill>
+                <a:schemeClr val="tx1"/>
+              </a:solidFill>
+              <a:latin typeface="Arial" panose="020B0604020202020204" pitchFamily="34" charset="0"/>
+              <a:cs typeface="Arial" panose="020B0604020202020204" pitchFamily="34" charset="0"/>
+            </a:endParaRPr>
+          </a:p>
+          <a:p>
+            <a:pPr marL="342900" indent="-342900" defTabSz="457200">
+              <a:buFont typeface="Wingdings" panose="05000000000000000000" pitchFamily="2" charset="2"/>
+              <a:buChar char="§"/>
+            </a:pPr>
+            <a:r>
+              <a:rPr lang="pt-BR" sz="2400" dirty="0">
+                <a:solidFill>
+                  <a:schemeClr val="tx1"/>
+                </a:solidFill>
+                <a:latin typeface="Arial" panose="020B0604020202020204" pitchFamily="34" charset="0"/>
+                <a:cs typeface="Arial" panose="020B0604020202020204" pitchFamily="34" charset="0"/>
+              </a:rPr>
               <a:t>Escrita de consultas SQL otimizadas</a:t>
             </a:r>
-          </a:p>
-          <a:p>
-            <a:r>
-              <a:rPr lang="pt-BR" sz="2800" dirty="0"/>
+            <a:br>
+              <a:rPr lang="pt-BR" sz="2400" dirty="0">
+                <a:solidFill>
+                  <a:schemeClr val="tx1"/>
+                </a:solidFill>
+                <a:latin typeface="Arial" panose="020B0604020202020204" pitchFamily="34" charset="0"/>
+                <a:cs typeface="Arial" panose="020B0604020202020204" pitchFamily="34" charset="0"/>
+              </a:rPr>
+            </a:br>
+            <a:endParaRPr lang="pt-BR" sz="2400" dirty="0">
+              <a:solidFill>
+                <a:schemeClr val="tx1"/>
+              </a:solidFill>
+              <a:latin typeface="Arial" panose="020B0604020202020204" pitchFamily="34" charset="0"/>
+              <a:cs typeface="Arial" panose="020B0604020202020204" pitchFamily="34" charset="0"/>
+            </a:endParaRPr>
+          </a:p>
+          <a:p>
+            <a:pPr marL="342900" indent="-342900" defTabSz="457200">
+              <a:buFont typeface="Wingdings" panose="05000000000000000000" pitchFamily="2" charset="2"/>
+              <a:buChar char="§"/>
+            </a:pPr>
+            <a:r>
+              <a:rPr lang="pt-BR" sz="2400" dirty="0">
+                <a:solidFill>
+                  <a:schemeClr val="tx1"/>
+                </a:solidFill>
+                <a:latin typeface="Arial" panose="020B0604020202020204" pitchFamily="34" charset="0"/>
+                <a:cs typeface="Arial" panose="020B0604020202020204" pitchFamily="34" charset="0"/>
+              </a:rPr>
               <a:t>Normalização de dados</a:t>
             </a:r>
-          </a:p>
-          <a:p>
-            <a:r>
-              <a:rPr lang="pt-BR" sz="2800" dirty="0"/>
+            <a:br>
+              <a:rPr lang="pt-BR" sz="2400" dirty="0">
+                <a:solidFill>
+                  <a:schemeClr val="tx1"/>
+                </a:solidFill>
+                <a:latin typeface="Arial" panose="020B0604020202020204" pitchFamily="34" charset="0"/>
+                <a:cs typeface="Arial" panose="020B0604020202020204" pitchFamily="34" charset="0"/>
+              </a:rPr>
+            </a:br>
+            <a:endParaRPr lang="pt-BR" sz="2400" dirty="0">
+              <a:solidFill>
+                <a:schemeClr val="tx1"/>
+              </a:solidFill>
+              <a:latin typeface="Arial" panose="020B0604020202020204" pitchFamily="34" charset="0"/>
+              <a:cs typeface="Arial" panose="020B0604020202020204" pitchFamily="34" charset="0"/>
+            </a:endParaRPr>
+          </a:p>
+          <a:p>
+            <a:pPr marL="342900" indent="-342900" defTabSz="457200">
+              <a:buFont typeface="Wingdings" panose="05000000000000000000" pitchFamily="2" charset="2"/>
+              <a:buChar char="§"/>
+            </a:pPr>
+            <a:r>
+              <a:rPr lang="pt-BR" sz="2400" dirty="0">
+                <a:solidFill>
+                  <a:schemeClr val="tx1"/>
+                </a:solidFill>
+                <a:latin typeface="Arial" panose="020B0604020202020204" pitchFamily="34" charset="0"/>
+                <a:cs typeface="Arial" panose="020B0604020202020204" pitchFamily="34" charset="0"/>
+              </a:rPr>
               <a:t>Automação com Python para dados</a:t>
             </a:r>
-          </a:p>
-          <a:p>
-            <a:r>
-              <a:rPr lang="pt-BR" sz="2800" dirty="0"/>
-              <a:t>Documentação técnica</a:t>
+            <a:br>
+              <a:rPr lang="pt-BR" sz="2400" dirty="0">
+                <a:solidFill>
+                  <a:schemeClr val="tx1"/>
+                </a:solidFill>
+                <a:latin typeface="Arial" panose="020B0604020202020204" pitchFamily="34" charset="0"/>
+                <a:cs typeface="Arial" panose="020B0604020202020204" pitchFamily="34" charset="0"/>
+              </a:rPr>
+            </a:br>
+            <a:endParaRPr lang="pt-BR" sz="2400" dirty="0">
+              <a:solidFill>
+                <a:schemeClr val="tx1"/>
+              </a:solidFill>
+              <a:latin typeface="Arial" panose="020B0604020202020204" pitchFamily="34" charset="0"/>
+              <a:cs typeface="Arial" panose="020B0604020202020204" pitchFamily="34" charset="0"/>
+            </a:endParaRPr>
+          </a:p>
+        </p:txBody>
+      </p:sp>
+      <p:sp>
+        <p:nvSpPr>
+          <p:cNvPr id="5" name="CaixaDeTexto 4">
+            <a:extLst>
+              <a:ext uri="{FF2B5EF4-FFF2-40B4-BE49-F238E27FC236}">
+                <a16:creationId xmlns:a16="http://schemas.microsoft.com/office/drawing/2014/main" id="{A446526F-D887-98FF-0203-1FA5D88DA0FE}"/>
+              </a:ext>
+            </a:extLst>
+          </p:cNvPr>
+          <p:cNvSpPr txBox="1"/>
+          <p:nvPr/>
+        </p:nvSpPr>
+        <p:spPr>
+          <a:xfrm>
+            <a:off x="8060787" y="876104"/>
+            <a:ext cx="2658795" cy="646331"/>
+          </a:xfrm>
+          <a:prstGeom prst="rect">
+            <a:avLst/>
+          </a:prstGeom>
+          <a:noFill/>
+        </p:spPr>
+        <p:txBody>
+          <a:bodyPr wrap="square">
+            <a:spAutoFit/>
+          </a:bodyPr>
+          <a:lstStyle/>
+          <a:p>
+            <a:r>
+              <a:rPr lang="pt-BR" sz="3200" dirty="0">
+                <a:latin typeface="Arial" panose="020B0604020202020204" pitchFamily="34" charset="0"/>
+                <a:cs typeface="Arial" panose="020B0604020202020204" pitchFamily="34" charset="0"/>
+              </a:rPr>
+              <a:t>Soft</a:t>
+            </a:r>
+            <a:r>
+              <a:rPr lang="pt-BR" sz="3600" dirty="0">
+                <a:latin typeface="Arial" panose="020B0604020202020204" pitchFamily="34" charset="0"/>
+                <a:cs typeface="Arial" panose="020B0604020202020204" pitchFamily="34" charset="0"/>
+              </a:rPr>
+              <a:t> </a:t>
+            </a:r>
+            <a:r>
+              <a:rPr lang="pt-BR" sz="3200" dirty="0">
+                <a:latin typeface="Arial" panose="020B0604020202020204" pitchFamily="34" charset="0"/>
+                <a:cs typeface="Arial" panose="020B0604020202020204" pitchFamily="34" charset="0"/>
+              </a:rPr>
+              <a:t>Skills</a:t>
+            </a:r>
+            <a:endParaRPr lang="pt-BR" sz="3600" dirty="0">
+              <a:latin typeface="Arial" panose="020B0604020202020204" pitchFamily="34" charset="0"/>
+              <a:cs typeface="Arial" panose="020B0604020202020204" pitchFamily="34" charset="0"/>
+            </a:endParaRPr>
+          </a:p>
+        </p:txBody>
+      </p:sp>
+      <p:sp>
+        <p:nvSpPr>
+          <p:cNvPr id="7" name="CaixaDeTexto 6">
+            <a:extLst>
+              <a:ext uri="{FF2B5EF4-FFF2-40B4-BE49-F238E27FC236}">
+                <a16:creationId xmlns:a16="http://schemas.microsoft.com/office/drawing/2014/main" id="{E68B8905-41BF-A615-0F38-C62EAD0ED6D8}"/>
+              </a:ext>
+            </a:extLst>
+          </p:cNvPr>
+          <p:cNvSpPr txBox="1"/>
+          <p:nvPr/>
+        </p:nvSpPr>
+        <p:spPr>
+          <a:xfrm>
+            <a:off x="7805810" y="1716258"/>
+            <a:ext cx="3926646" cy="3785652"/>
+          </a:xfrm>
+          <a:prstGeom prst="rect">
+            <a:avLst/>
+          </a:prstGeom>
+          <a:noFill/>
+        </p:spPr>
+        <p:txBody>
+          <a:bodyPr wrap="square">
+            <a:spAutoFit/>
+          </a:bodyPr>
+          <a:lstStyle/>
+          <a:p>
+            <a:pPr marL="342900" indent="-342900">
+              <a:buFont typeface="Wingdings" panose="05000000000000000000" pitchFamily="2" charset="2"/>
+              <a:buChar char="§"/>
+            </a:pPr>
+            <a:r>
+              <a:rPr lang="pt-BR" sz="2400" dirty="0">
+                <a:latin typeface="Arial" panose="020B0604020202020204" pitchFamily="34" charset="0"/>
+                <a:cs typeface="Arial" panose="020B0604020202020204" pitchFamily="34" charset="0"/>
+              </a:rPr>
+              <a:t>Atenção aos detalhes</a:t>
+            </a:r>
+            <a:br>
+              <a:rPr lang="pt-BR" sz="2400" dirty="0">
+                <a:latin typeface="Arial" panose="020B0604020202020204" pitchFamily="34" charset="0"/>
+                <a:cs typeface="Arial" panose="020B0604020202020204" pitchFamily="34" charset="0"/>
+              </a:rPr>
+            </a:br>
+            <a:endParaRPr lang="pt-BR" sz="2400" dirty="0">
+              <a:latin typeface="Arial" panose="020B0604020202020204" pitchFamily="34" charset="0"/>
+              <a:cs typeface="Arial" panose="020B0604020202020204" pitchFamily="34" charset="0"/>
+            </a:endParaRPr>
+          </a:p>
+          <a:p>
+            <a:pPr marL="342900" indent="-342900">
+              <a:buFont typeface="Wingdings" panose="05000000000000000000" pitchFamily="2" charset="2"/>
+              <a:buChar char="§"/>
+            </a:pPr>
+            <a:r>
+              <a:rPr lang="pt-BR" sz="2400" dirty="0">
+                <a:latin typeface="Arial" panose="020B0604020202020204" pitchFamily="34" charset="0"/>
+                <a:cs typeface="Arial" panose="020B0604020202020204" pitchFamily="34" charset="0"/>
+              </a:rPr>
+              <a:t>Facilidade de aprendizado</a:t>
+            </a:r>
+            <a:br>
+              <a:rPr lang="pt-BR" sz="2400" dirty="0">
+                <a:latin typeface="Arial" panose="020B0604020202020204" pitchFamily="34" charset="0"/>
+                <a:cs typeface="Arial" panose="020B0604020202020204" pitchFamily="34" charset="0"/>
+              </a:rPr>
+            </a:br>
+            <a:endParaRPr lang="pt-BR" sz="2400" dirty="0">
+              <a:latin typeface="Arial" panose="020B0604020202020204" pitchFamily="34" charset="0"/>
+              <a:cs typeface="Arial" panose="020B0604020202020204" pitchFamily="34" charset="0"/>
+            </a:endParaRPr>
+          </a:p>
+          <a:p>
+            <a:pPr marL="342900" indent="-342900">
+              <a:buFont typeface="Wingdings" panose="05000000000000000000" pitchFamily="2" charset="2"/>
+              <a:buChar char="§"/>
+            </a:pPr>
+            <a:r>
+              <a:rPr lang="pt-BR" sz="2400" dirty="0">
+                <a:latin typeface="Arial" panose="020B0604020202020204" pitchFamily="34" charset="0"/>
+                <a:cs typeface="Arial" panose="020B0604020202020204" pitchFamily="34" charset="0"/>
+              </a:rPr>
+              <a:t>Responsabilidade com dados sensíveis</a:t>
+            </a:r>
+            <a:br>
+              <a:rPr lang="pt-BR" sz="2400" dirty="0">
+                <a:latin typeface="Arial" panose="020B0604020202020204" pitchFamily="34" charset="0"/>
+                <a:cs typeface="Arial" panose="020B0604020202020204" pitchFamily="34" charset="0"/>
+              </a:rPr>
+            </a:br>
+            <a:endParaRPr lang="pt-BR" sz="2400" dirty="0">
+              <a:latin typeface="Arial" panose="020B0604020202020204" pitchFamily="34" charset="0"/>
+              <a:cs typeface="Arial" panose="020B0604020202020204" pitchFamily="34" charset="0"/>
+            </a:endParaRPr>
+          </a:p>
+          <a:p>
+            <a:pPr marL="342900" indent="-342900">
+              <a:buFont typeface="Wingdings" panose="05000000000000000000" pitchFamily="2" charset="2"/>
+              <a:buChar char="§"/>
+            </a:pPr>
+            <a:r>
+              <a:rPr lang="pt-BR" sz="2400" dirty="0">
+                <a:latin typeface="Arial" panose="020B0604020202020204" pitchFamily="34" charset="0"/>
+                <a:cs typeface="Arial" panose="020B0604020202020204" pitchFamily="34" charset="0"/>
+              </a:rPr>
+              <a:t>Gestão de prioridades e proatividade</a:t>
             </a:r>
           </a:p>
         </p:txBody>
@@ -5170,7 +6107,7 @@
           <p:cNvPr id="2" name="Título 1">
             <a:extLst>
               <a:ext uri="{FF2B5EF4-FFF2-40B4-BE49-F238E27FC236}">
-                <a16:creationId xmlns:a16="http://schemas.microsoft.com/office/drawing/2014/main" id="{A0505F73-8481-A798-F2E8-2EFB87447D8F}"/>
+                <a16:creationId xmlns:a16="http://schemas.microsoft.com/office/drawing/2014/main" id="{8B51BB7F-C1C6-9E4C-A357-BBFE6692BACC}"/>
               </a:ext>
             </a:extLst>
           </p:cNvPr>
@@ -5183,17 +6120,22 @@
         </p:nvSpPr>
         <p:spPr>
           <a:xfrm>
-            <a:off x="8461716" y="2623624"/>
-            <a:ext cx="2736166" cy="805375"/>
-          </a:xfrm>
-        </p:spPr>
-        <p:txBody>
-          <a:bodyPr/>
+            <a:off x="1219200" y="658317"/>
+            <a:ext cx="9601200" cy="805375"/>
+          </a:xfrm>
+        </p:spPr>
+        <p:txBody>
+          <a:bodyPr>
+            <a:normAutofit/>
+          </a:bodyPr>
           <a:lstStyle/>
           <a:p>
             <a:r>
-              <a:rPr lang="pt-BR" dirty="0"/>
-              <a:t>Soft Skills</a:t>
+              <a:rPr lang="pt-BR" sz="3200" dirty="0">
+                <a:latin typeface="Arial" panose="020B0604020202020204" pitchFamily="34" charset="0"/>
+                <a:cs typeface="Arial" panose="020B0604020202020204" pitchFamily="34" charset="0"/>
+              </a:rPr>
+              <a:t>Experiência Prática</a:t>
             </a:r>
           </a:p>
         </p:txBody>
@@ -5203,7 +6145,7 @@
           <p:cNvPr id="3" name="Espaço Reservado para Conteúdo 2">
             <a:extLst>
               <a:ext uri="{FF2B5EF4-FFF2-40B4-BE49-F238E27FC236}">
-                <a16:creationId xmlns:a16="http://schemas.microsoft.com/office/drawing/2014/main" id="{54BAF460-A2AC-2C6B-B71B-FAA3D79C6DC7}"/>
+                <a16:creationId xmlns:a16="http://schemas.microsoft.com/office/drawing/2014/main" id="{E448EF70-08A5-A2C6-A14A-21B40F70CA2E}"/>
               </a:ext>
             </a:extLst>
           </p:cNvPr>
@@ -5216,8 +6158,8 @@
         </p:nvSpPr>
         <p:spPr>
           <a:xfrm>
-            <a:off x="1512277" y="1506415"/>
-            <a:ext cx="4724400" cy="3039794"/>
+            <a:off x="1219200" y="1623060"/>
+            <a:ext cx="9601200" cy="430823"/>
           </a:xfrm>
         </p:spPr>
         <p:txBody>
@@ -5226,33 +6168,197 @@
           </a:bodyPr>
           <a:lstStyle/>
           <a:p>
-            <a:r>
-              <a:rPr lang="pt-BR" sz="2800" dirty="0"/>
-              <a:t>Atenção aos detalhes</a:t>
-            </a:r>
-          </a:p>
-          <a:p>
-            <a:r>
-              <a:rPr lang="pt-BR" sz="2800" dirty="0"/>
-              <a:t>Facilidade de aprendizado</a:t>
-            </a:r>
-          </a:p>
-          <a:p>
-            <a:r>
-              <a:rPr lang="pt-BR" sz="2800" dirty="0"/>
-              <a:t>Responsabilidade com dados sensíveis</a:t>
-            </a:r>
-          </a:p>
-          <a:p>
-            <a:r>
-              <a:rPr lang="pt-BR" sz="2800" dirty="0"/>
-              <a:t>Boa comunicação</a:t>
-            </a:r>
-          </a:p>
-          <a:p>
-            <a:r>
-              <a:rPr lang="pt-BR" sz="2800" dirty="0"/>
-              <a:t>Gestão de Prioridades e Proatividade</a:t>
+            <a:pPr marL="0" indent="0">
+              <a:buNone/>
+            </a:pPr>
+            <a:r>
+              <a:rPr lang="pt-BR" sz="2400" b="1" dirty="0">
+                <a:latin typeface="Arial" panose="020B0604020202020204" pitchFamily="34" charset="0"/>
+                <a:cs typeface="Arial" panose="020B0604020202020204" pitchFamily="34" charset="0"/>
+              </a:rPr>
+              <a:t>Pipeline de Análise de Dados</a:t>
+            </a:r>
+            <a:br>
+              <a:rPr lang="pt-BR" sz="2400" dirty="0">
+                <a:latin typeface="Arial" panose="020B0604020202020204" pitchFamily="34" charset="0"/>
+                <a:cs typeface="Arial" panose="020B0604020202020204" pitchFamily="34" charset="0"/>
+              </a:rPr>
+            </a:br>
+            <a:br>
+              <a:rPr lang="pt-BR" sz="2400" dirty="0">
+                <a:latin typeface="Arial" panose="020B0604020202020204" pitchFamily="34" charset="0"/>
+                <a:cs typeface="Arial" panose="020B0604020202020204" pitchFamily="34" charset="0"/>
+              </a:rPr>
+            </a:br>
+            <a:endParaRPr lang="pt-BR" sz="2400" dirty="0">
+              <a:latin typeface="Arial" panose="020B0604020202020204" pitchFamily="34" charset="0"/>
+              <a:cs typeface="Arial" panose="020B0604020202020204" pitchFamily="34" charset="0"/>
+            </a:endParaRPr>
+          </a:p>
+        </p:txBody>
+      </p:sp>
+      <p:sp>
+        <p:nvSpPr>
+          <p:cNvPr id="5" name="CaixaDeTexto 4">
+            <a:extLst>
+              <a:ext uri="{FF2B5EF4-FFF2-40B4-BE49-F238E27FC236}">
+                <a16:creationId xmlns:a16="http://schemas.microsoft.com/office/drawing/2014/main" id="{89334114-F581-D4AA-28EE-A4C7B74B3EF8}"/>
+              </a:ext>
+            </a:extLst>
+          </p:cNvPr>
+          <p:cNvSpPr txBox="1"/>
+          <p:nvPr/>
+        </p:nvSpPr>
+        <p:spPr>
+          <a:xfrm>
+            <a:off x="2528082" y="2372618"/>
+            <a:ext cx="7135836" cy="2862322"/>
+          </a:xfrm>
+          <a:prstGeom prst="rect">
+            <a:avLst/>
+          </a:prstGeom>
+          <a:noFill/>
+        </p:spPr>
+        <p:txBody>
+          <a:bodyPr wrap="square">
+            <a:spAutoFit/>
+          </a:bodyPr>
+          <a:lstStyle/>
+          <a:p>
+            <a:pPr algn="ctr"/>
+            <a:r>
+              <a:rPr lang="pt-BR" sz="2000" dirty="0">
+                <a:latin typeface="Arial" panose="020B0604020202020204" pitchFamily="34" charset="0"/>
+                <a:cs typeface="Arial" panose="020B0604020202020204" pitchFamily="34" charset="0"/>
+              </a:rPr>
+              <a:t>Banco de Dados PostgreSQL</a:t>
+            </a:r>
+          </a:p>
+          <a:p>
+            <a:pPr marL="0" indent="0" algn="ctr">
+              <a:buNone/>
+            </a:pPr>
+            <a:r>
+              <a:rPr lang="pt-BR" sz="2000" dirty="0">
+                <a:latin typeface="Arial" panose="020B0604020202020204" pitchFamily="34" charset="0"/>
+                <a:cs typeface="Arial" panose="020B0604020202020204" pitchFamily="34" charset="0"/>
+              </a:rPr>
+              <a:t>↓</a:t>
+            </a:r>
+          </a:p>
+          <a:p>
+            <a:pPr algn="ctr"/>
+            <a:r>
+              <a:rPr lang="pt-BR" sz="2000" dirty="0">
+                <a:latin typeface="Arial" panose="020B0604020202020204" pitchFamily="34" charset="0"/>
+                <a:cs typeface="Arial" panose="020B0604020202020204" pitchFamily="34" charset="0"/>
+              </a:rPr>
+              <a:t>Extração de dados</a:t>
+            </a:r>
+          </a:p>
+          <a:p>
+            <a:pPr marL="0" indent="0" algn="ctr">
+              <a:buNone/>
+            </a:pPr>
+            <a:r>
+              <a:rPr lang="pt-BR" sz="2000" dirty="0">
+                <a:latin typeface="Arial" panose="020B0604020202020204" pitchFamily="34" charset="0"/>
+                <a:cs typeface="Arial" panose="020B0604020202020204" pitchFamily="34" charset="0"/>
+              </a:rPr>
+              <a:t>↓</a:t>
+            </a:r>
+          </a:p>
+          <a:p>
+            <a:pPr algn="ctr"/>
+            <a:r>
+              <a:rPr lang="pt-BR" sz="2000" dirty="0">
+                <a:latin typeface="Arial" panose="020B0604020202020204" pitchFamily="34" charset="0"/>
+                <a:cs typeface="Arial" panose="020B0604020202020204" pitchFamily="34" charset="0"/>
+              </a:rPr>
+              <a:t>Tratamento e exploração no Google Colab</a:t>
+            </a:r>
+          </a:p>
+          <a:p>
+            <a:pPr marL="0" indent="0" algn="ctr">
+              <a:buNone/>
+            </a:pPr>
+            <a:r>
+              <a:rPr lang="pt-BR" sz="2000" dirty="0">
+                <a:latin typeface="Arial" panose="020B0604020202020204" pitchFamily="34" charset="0"/>
+                <a:cs typeface="Arial" panose="020B0604020202020204" pitchFamily="34" charset="0"/>
+              </a:rPr>
+              <a:t> ↓</a:t>
+            </a:r>
+          </a:p>
+          <a:p>
+            <a:pPr algn="ctr"/>
+            <a:r>
+              <a:rPr lang="pt-BR" sz="2000" dirty="0">
+                <a:latin typeface="Arial" panose="020B0604020202020204" pitchFamily="34" charset="0"/>
+                <a:cs typeface="Arial" panose="020B0604020202020204" pitchFamily="34" charset="0"/>
+              </a:rPr>
+              <a:t>Limpeza e análise com Pandas no VS Code</a:t>
+            </a:r>
+          </a:p>
+          <a:p>
+            <a:pPr marL="0" indent="0" algn="ctr">
+              <a:buNone/>
+            </a:pPr>
+            <a:r>
+              <a:rPr lang="pt-BR" sz="2000" dirty="0">
+                <a:latin typeface="Arial" panose="020B0604020202020204" pitchFamily="34" charset="0"/>
+                <a:cs typeface="Arial" panose="020B0604020202020204" pitchFamily="34" charset="0"/>
+              </a:rPr>
+              <a:t> ↓</a:t>
+            </a:r>
+          </a:p>
+          <a:p>
+            <a:pPr algn="ctr"/>
+            <a:r>
+              <a:rPr lang="pt-BR" sz="2000" dirty="0">
+                <a:latin typeface="Arial" panose="020B0604020202020204" pitchFamily="34" charset="0"/>
+                <a:cs typeface="Arial" panose="020B0604020202020204" pitchFamily="34" charset="0"/>
+              </a:rPr>
+              <a:t>Visualização e geração de insights de negócio</a:t>
+            </a:r>
+          </a:p>
+        </p:txBody>
+      </p:sp>
+      <p:sp>
+        <p:nvSpPr>
+          <p:cNvPr id="6" name="CaixaDeTexto 5">
+            <a:extLst>
+              <a:ext uri="{FF2B5EF4-FFF2-40B4-BE49-F238E27FC236}">
+                <a16:creationId xmlns:a16="http://schemas.microsoft.com/office/drawing/2014/main" id="{3BD3DBB7-0FB8-6CA8-E5B3-85B7780C9DD8}"/>
+              </a:ext>
+            </a:extLst>
+          </p:cNvPr>
+          <p:cNvSpPr txBox="1"/>
+          <p:nvPr/>
+        </p:nvSpPr>
+        <p:spPr>
+          <a:xfrm>
+            <a:off x="1329397" y="5553675"/>
+            <a:ext cx="10515600" cy="1200329"/>
+          </a:xfrm>
+          <a:prstGeom prst="rect">
+            <a:avLst/>
+          </a:prstGeom>
+          <a:noFill/>
+        </p:spPr>
+        <p:txBody>
+          <a:bodyPr wrap="square" rtlCol="0">
+            <a:spAutoFit/>
+          </a:bodyPr>
+          <a:lstStyle/>
+          <a:p>
+            <a:pPr algn="ctr"/>
+            <a:r>
+              <a:rPr lang="pt-BR" sz="2400" b="1" dirty="0">
+                <a:latin typeface="Arial" panose="020B0604020202020204" pitchFamily="34" charset="0"/>
+                <a:cs typeface="Arial" panose="020B0604020202020204" pitchFamily="34" charset="0"/>
+              </a:rPr>
+              <a:t>Projeto desenvolvido para simular um cenário real de análise de dados de vendas, utilizando SQL e Python para transformar dados operacionais em insights de negócio.</a:t>
             </a:r>
           </a:p>
         </p:txBody>
@@ -5260,7 +6366,7 @@
     </p:spTree>
     <p:extLst>
       <p:ext uri="{BB962C8B-B14F-4D97-AF65-F5344CB8AC3E}">
-        <p14:creationId xmlns:p14="http://schemas.microsoft.com/office/powerpoint/2010/main" val="2204816403"/>
+        <p14:creationId xmlns:p14="http://schemas.microsoft.com/office/powerpoint/2010/main" val="532482051"/>
       </p:ext>
     </p:extLst>
   </p:cSld>
@@ -5275,7 +6381,13 @@
   <p:cSld>
     <p:spTree>
       <p:nvGrpSpPr>
-        <p:cNvPr id="1" name=""/>
+        <p:cNvPr id="1" name="">
+          <a:extLst>
+            <a:ext uri="{FF2B5EF4-FFF2-40B4-BE49-F238E27FC236}">
+              <a16:creationId xmlns:a16="http://schemas.microsoft.com/office/drawing/2014/main" id="{1CF5CA0F-930B-7327-E717-6ED5FCDFA113}"/>
+            </a:ext>
+          </a:extLst>
+        </p:cNvPr>
         <p:cNvGrpSpPr/>
         <p:nvPr/>
       </p:nvGrpSpPr>
@@ -5292,7 +6404,7 @@
           <p:cNvPr id="2" name="Título 1">
             <a:extLst>
               <a:ext uri="{FF2B5EF4-FFF2-40B4-BE49-F238E27FC236}">
-                <a16:creationId xmlns:a16="http://schemas.microsoft.com/office/drawing/2014/main" id="{8B51BB7F-C1C6-9E4C-A357-BBFE6692BACC}"/>
+                <a16:creationId xmlns:a16="http://schemas.microsoft.com/office/drawing/2014/main" id="{9C276C2F-CF5D-F063-6DB8-4CA70232C6F6}"/>
               </a:ext>
             </a:extLst>
           </p:cNvPr>
@@ -5303,81 +6415,461 @@
             <p:ph type="title"/>
           </p:nvPr>
         </p:nvSpPr>
-        <p:spPr/>
-        <p:txBody>
-          <a:bodyPr/>
+        <p:spPr>
+          <a:xfrm>
+            <a:off x="1371600" y="685800"/>
+            <a:ext cx="9601200" cy="903849"/>
+          </a:xfrm>
+        </p:spPr>
+        <p:txBody>
+          <a:bodyPr>
+            <a:normAutofit/>
+          </a:bodyPr>
           <a:lstStyle/>
           <a:p>
             <a:r>
-              <a:rPr lang="pt-BR" dirty="0"/>
-              <a:t>Experiência Prática</a:t>
-            </a:r>
-          </a:p>
-        </p:txBody>
-      </p:sp>
-      <p:sp>
-        <p:nvSpPr>
-          <p:cNvPr id="3" name="Espaço Reservado para Conteúdo 2">
+              <a:rPr lang="pt-BR" sz="3200" dirty="0">
+                <a:latin typeface="Arial" panose="020B0604020202020204" pitchFamily="34" charset="0"/>
+                <a:cs typeface="Arial" panose="020B0604020202020204" pitchFamily="34" charset="0"/>
+              </a:rPr>
+              <a:t>Etapas do projeto</a:t>
+            </a:r>
+          </a:p>
+        </p:txBody>
+      </p:sp>
+      <p:sp>
+        <p:nvSpPr>
+          <p:cNvPr id="5" name="Rectangle 2">
             <a:extLst>
               <a:ext uri="{FF2B5EF4-FFF2-40B4-BE49-F238E27FC236}">
-                <a16:creationId xmlns:a16="http://schemas.microsoft.com/office/drawing/2014/main" id="{E448EF70-08A5-A2C6-A14A-21B40F70CA2E}"/>
+                <a16:creationId xmlns:a16="http://schemas.microsoft.com/office/drawing/2014/main" id="{9D79DC60-6382-333D-3951-3C450236AA47}"/>
               </a:ext>
             </a:extLst>
           </p:cNvPr>
           <p:cNvSpPr>
-            <a:spLocks noGrp="1"/>
+            <a:spLocks noGrp="1" noChangeArrowheads="1"/>
           </p:cNvSpPr>
           <p:nvPr>
             <p:ph idx="1"/>
           </p:nvPr>
         </p:nvSpPr>
-        <p:spPr>
-          <a:xfrm>
-            <a:off x="1371600" y="2286000"/>
-            <a:ext cx="9601200" cy="2637692"/>
-          </a:xfrm>
-        </p:spPr>
-        <p:txBody>
-          <a:bodyPr>
-            <a:normAutofit lnSpcReduction="10000"/>
+        <p:spPr bwMode="auto">
+          <a:xfrm>
+            <a:off x="965982" y="2017216"/>
+            <a:ext cx="11019692" cy="4154984"/>
+          </a:xfrm>
+          <a:prstGeom prst="rect">
+            <a:avLst/>
+          </a:prstGeom>
+          <a:noFill/>
+          <a:ln>
+            <a:noFill/>
+          </a:ln>
+          <a:effectLst/>
+          <a:extLst>
+            <a:ext uri="{909E8E84-426E-40DD-AFC4-6F175D3DCCD1}">
+              <a14:hiddenFill xmlns:a14="http://schemas.microsoft.com/office/drawing/2010/main">
+                <a:solidFill>
+                  <a:schemeClr val="accent1"/>
+                </a:solidFill>
+              </a14:hiddenFill>
+            </a:ext>
+            <a:ext uri="{91240B29-F687-4F45-9708-019B960494DF}">
+              <a14:hiddenLine xmlns:a14="http://schemas.microsoft.com/office/drawing/2010/main" w="9525">
+                <a:solidFill>
+                  <a:schemeClr val="tx1"/>
+                </a:solidFill>
+                <a:miter lim="800000"/>
+                <a:headEnd/>
+                <a:tailEnd/>
+              </a14:hiddenLine>
+            </a:ext>
+            <a:ext uri="{AF507438-7753-43E0-B8FC-AC1667EBCBE1}">
+              <a14:hiddenEffects xmlns:a14="http://schemas.microsoft.com/office/drawing/2010/main">
+                <a:effectLst>
+                  <a:outerShdw dist="35921" dir="2700000" algn="ctr" rotWithShape="0">
+                    <a:schemeClr val="bg2"/>
+                  </a:outerShdw>
+                </a:effectLst>
+              </a14:hiddenEffects>
+            </a:ext>
+          </a:extLst>
+        </p:spPr>
+        <p:txBody>
+          <a:bodyPr vert="horz" wrap="square" lIns="91440" tIns="45720" rIns="91440" bIns="45720" numCol="1" anchor="ctr" anchorCtr="0" compatLnSpc="1">
+            <a:prstTxWarp prst="textNoShape">
+              <a:avLst/>
+            </a:prstTxWarp>
+            <a:spAutoFit/>
           </a:bodyPr>
           <a:lstStyle/>
           <a:p>
-            <a:pPr marL="0" indent="0" algn="ctr">
-              <a:buNone/>
+            <a:pPr marR="0" lvl="0" algn="l" defTabSz="914400" rtl="0" eaLnBrk="0" fontAlgn="base" latinLnBrk="0" hangingPunct="0">
+              <a:lnSpc>
+                <a:spcPct val="100000"/>
+              </a:lnSpc>
+              <a:spcBef>
+                <a:spcPct val="0"/>
+              </a:spcBef>
+              <a:spcAft>
+                <a:spcPct val="0"/>
+              </a:spcAft>
+              <a:buClrTx/>
+              <a:buSzTx/>
+              <a:buFont typeface="Wingdings" panose="05000000000000000000" pitchFamily="2" charset="2"/>
+              <a:buChar char="§"/>
+              <a:tabLst/>
             </a:pPr>
             <a:r>
-              <a:rPr lang="pt-BR" sz="2400" dirty="0"/>
-              <a:t>Busco minha primeira oportunidade na área de dados, com foco em SQL, análise de dados operacionais e bancos de dados relacionais.</a:t>
-            </a:r>
-          </a:p>
-          <a:p>
-            <a:pPr marL="0" indent="0" algn="ctr">
-              <a:buNone/>
+              <a:rPr kumimoji="0" lang="pt-BR" altLang="pt-BR" sz="2400" i="0" u="none" strike="noStrike" cap="none" normalizeH="0" baseline="0" dirty="0">
+                <a:ln>
+                  <a:noFill/>
+                </a:ln>
+                <a:solidFill>
+                  <a:schemeClr val="tx1"/>
+                </a:solidFill>
+                <a:effectLst/>
+                <a:latin typeface="Arial" panose="020B0604020202020204" pitchFamily="34" charset="0"/>
+              </a:rPr>
+              <a:t>Extração de dados de um banco </a:t>
+            </a:r>
+            <a:r>
+              <a:rPr kumimoji="0" lang="pt-BR" altLang="pt-BR" sz="2400" b="1" i="0" u="none" strike="noStrike" cap="none" normalizeH="0" baseline="0" dirty="0">
+                <a:ln>
+                  <a:noFill/>
+                </a:ln>
+                <a:solidFill>
+                  <a:schemeClr val="tx1"/>
+                </a:solidFill>
+                <a:effectLst/>
+                <a:latin typeface="Arial" panose="020B0604020202020204" pitchFamily="34" charset="0"/>
+              </a:rPr>
+              <a:t>PostgreSQL</a:t>
+            </a:r>
+            <a:br>
+              <a:rPr kumimoji="0" lang="pt-BR" altLang="pt-BR" sz="2400" b="1" i="0" u="none" strike="noStrike" cap="none" normalizeH="0" baseline="0" dirty="0">
+                <a:ln>
+                  <a:noFill/>
+                </a:ln>
+                <a:solidFill>
+                  <a:schemeClr val="tx1"/>
+                </a:solidFill>
+                <a:effectLst/>
+                <a:latin typeface="Arial" panose="020B0604020202020204" pitchFamily="34" charset="0"/>
+              </a:rPr>
+            </a:br>
+            <a:endParaRPr kumimoji="0" lang="pt-BR" altLang="pt-BR" sz="2400" b="1" i="0" u="none" strike="noStrike" cap="none" normalizeH="0" baseline="0" dirty="0">
+              <a:ln>
+                <a:noFill/>
+              </a:ln>
+              <a:solidFill>
+                <a:schemeClr val="tx1"/>
+              </a:solidFill>
+              <a:effectLst/>
+              <a:latin typeface="Arial" panose="020B0604020202020204" pitchFamily="34" charset="0"/>
+            </a:endParaRPr>
+          </a:p>
+          <a:p>
+            <a:pPr marR="0" lvl="0" algn="l" defTabSz="914400" rtl="0" eaLnBrk="0" fontAlgn="base" latinLnBrk="0" hangingPunct="0">
+              <a:lnSpc>
+                <a:spcPct val="100000"/>
+              </a:lnSpc>
+              <a:spcBef>
+                <a:spcPct val="0"/>
+              </a:spcBef>
+              <a:spcAft>
+                <a:spcPct val="0"/>
+              </a:spcAft>
+              <a:buClrTx/>
+              <a:buSzTx/>
+              <a:buFont typeface="Wingdings" panose="05000000000000000000" pitchFamily="2" charset="2"/>
+              <a:buChar char="§"/>
+              <a:tabLst/>
             </a:pPr>
             <a:r>
-              <a:rPr lang="pt-BR" sz="2400" dirty="0"/>
-              <a:t>Desenvolvo projetos próprios que simulam cenários corporativos, envolvendo modelagem de dados, consultas analíticas, automação e análise de performance em MySQL e PostgreSQL, com apoio de Python.</a:t>
-            </a:r>
-          </a:p>
-          <a:p>
-            <a:pPr marL="0" indent="0" algn="ctr">
-              <a:buNone/>
+              <a:rPr kumimoji="0" lang="pt-BR" altLang="pt-BR" sz="2400" i="0" u="none" strike="noStrike" cap="none" normalizeH="0" baseline="0" dirty="0">
+                <a:ln>
+                  <a:noFill/>
+                </a:ln>
+                <a:solidFill>
+                  <a:schemeClr val="tx1"/>
+                </a:solidFill>
+                <a:effectLst/>
+                <a:latin typeface="Arial" panose="020B0604020202020204" pitchFamily="34" charset="0"/>
+              </a:rPr>
+              <a:t>Exploração inicial e testes de análise no </a:t>
+            </a:r>
+            <a:r>
+              <a:rPr kumimoji="0" lang="pt-BR" altLang="pt-BR" sz="2400" b="1" i="0" u="none" strike="noStrike" cap="none" normalizeH="0" baseline="0" dirty="0">
+                <a:ln>
+                  <a:noFill/>
+                </a:ln>
+                <a:solidFill>
+                  <a:schemeClr val="tx1"/>
+                </a:solidFill>
+                <a:effectLst/>
+                <a:latin typeface="Arial" panose="020B0604020202020204" pitchFamily="34" charset="0"/>
+              </a:rPr>
+              <a:t>Google Colab</a:t>
+            </a:r>
+            <a:br>
+              <a:rPr kumimoji="0" lang="pt-BR" altLang="pt-BR" sz="2400" b="1" i="0" u="none" strike="noStrike" cap="none" normalizeH="0" baseline="0" dirty="0">
+                <a:ln>
+                  <a:noFill/>
+                </a:ln>
+                <a:solidFill>
+                  <a:schemeClr val="tx1"/>
+                </a:solidFill>
+                <a:effectLst/>
+                <a:latin typeface="Arial" panose="020B0604020202020204" pitchFamily="34" charset="0"/>
+              </a:rPr>
+            </a:br>
+            <a:endParaRPr kumimoji="0" lang="pt-BR" altLang="pt-BR" sz="2400" b="1" i="0" u="none" strike="noStrike" cap="none" normalizeH="0" baseline="0" dirty="0">
+              <a:ln>
+                <a:noFill/>
+              </a:ln>
+              <a:solidFill>
+                <a:schemeClr val="tx1"/>
+              </a:solidFill>
+              <a:effectLst/>
+              <a:latin typeface="Arial" panose="020B0604020202020204" pitchFamily="34" charset="0"/>
+            </a:endParaRPr>
+          </a:p>
+          <a:p>
+            <a:pPr marR="0" lvl="0" algn="l" defTabSz="914400" rtl="0" eaLnBrk="0" fontAlgn="base" latinLnBrk="0" hangingPunct="0">
+              <a:lnSpc>
+                <a:spcPct val="100000"/>
+              </a:lnSpc>
+              <a:spcBef>
+                <a:spcPct val="0"/>
+              </a:spcBef>
+              <a:spcAft>
+                <a:spcPct val="0"/>
+              </a:spcAft>
+              <a:buClrTx/>
+              <a:buSzTx/>
+              <a:buFont typeface="Wingdings" panose="05000000000000000000" pitchFamily="2" charset="2"/>
+              <a:buChar char="§"/>
+              <a:tabLst/>
             </a:pPr>
             <a:r>
-              <a:rPr lang="pt-BR" sz="2400" dirty="0"/>
-              <a:t>Essa prática contínua visa consolidar uma base técnica para atuação como Analista de Dados SQL / Analista de Banco de Dados Júnior.</a:t>
-            </a:r>
-          </a:p>
-          <a:p>
-            <a:endParaRPr lang="pt-BR" dirty="0"/>
+              <a:rPr kumimoji="0" lang="pt-BR" altLang="pt-BR" sz="2400" i="0" u="none" strike="noStrike" cap="none" normalizeH="0" baseline="0" dirty="0">
+                <a:ln>
+                  <a:noFill/>
+                </a:ln>
+                <a:solidFill>
+                  <a:schemeClr val="tx1"/>
+                </a:solidFill>
+                <a:effectLst/>
+                <a:latin typeface="Arial" panose="020B0604020202020204" pitchFamily="34" charset="0"/>
+              </a:rPr>
+              <a:t>Tratamento e limpeza de dados com </a:t>
+            </a:r>
+            <a:r>
+              <a:rPr kumimoji="0" lang="pt-BR" altLang="pt-BR" sz="2400" b="1" i="0" u="none" strike="noStrike" cap="none" normalizeH="0" baseline="0" dirty="0">
+                <a:ln>
+                  <a:noFill/>
+                </a:ln>
+                <a:solidFill>
+                  <a:schemeClr val="tx1"/>
+                </a:solidFill>
+                <a:effectLst/>
+                <a:latin typeface="Arial" panose="020B0604020202020204" pitchFamily="34" charset="0"/>
+              </a:rPr>
+              <a:t>Pandas</a:t>
+            </a:r>
+            <a:br>
+              <a:rPr kumimoji="0" lang="pt-BR" altLang="pt-BR" sz="2400" b="1" i="0" u="none" strike="noStrike" cap="none" normalizeH="0" baseline="0" dirty="0">
+                <a:ln>
+                  <a:noFill/>
+                </a:ln>
+                <a:solidFill>
+                  <a:schemeClr val="tx1"/>
+                </a:solidFill>
+                <a:effectLst/>
+                <a:latin typeface="Arial" panose="020B0604020202020204" pitchFamily="34" charset="0"/>
+              </a:rPr>
+            </a:br>
+            <a:endParaRPr kumimoji="0" lang="pt-BR" altLang="pt-BR" sz="2400" b="1" i="0" u="none" strike="noStrike" cap="none" normalizeH="0" baseline="0" dirty="0">
+              <a:ln>
+                <a:noFill/>
+              </a:ln>
+              <a:solidFill>
+                <a:schemeClr val="tx1"/>
+              </a:solidFill>
+              <a:effectLst/>
+              <a:latin typeface="Arial" panose="020B0604020202020204" pitchFamily="34" charset="0"/>
+            </a:endParaRPr>
+          </a:p>
+          <a:p>
+            <a:pPr marR="0" lvl="0" algn="l" defTabSz="914400" rtl="0" eaLnBrk="0" fontAlgn="base" latinLnBrk="0" hangingPunct="0">
+              <a:lnSpc>
+                <a:spcPct val="100000"/>
+              </a:lnSpc>
+              <a:spcBef>
+                <a:spcPct val="0"/>
+              </a:spcBef>
+              <a:spcAft>
+                <a:spcPct val="0"/>
+              </a:spcAft>
+              <a:buClrTx/>
+              <a:buSzTx/>
+              <a:buFont typeface="Wingdings" panose="05000000000000000000" pitchFamily="2" charset="2"/>
+              <a:buChar char="§"/>
+              <a:tabLst/>
+            </a:pPr>
+            <a:r>
+              <a:rPr kumimoji="0" lang="pt-BR" altLang="pt-BR" sz="2400" i="0" u="none" strike="noStrike" cap="none" normalizeH="0" baseline="0" dirty="0">
+                <a:ln>
+                  <a:noFill/>
+                </a:ln>
+                <a:solidFill>
+                  <a:schemeClr val="tx1"/>
+                </a:solidFill>
+                <a:effectLst/>
+                <a:latin typeface="Arial" panose="020B0604020202020204" pitchFamily="34" charset="0"/>
+              </a:rPr>
+              <a:t>Análise exploratória e cálculo de métricas de faturamento</a:t>
+            </a:r>
+            <a:br>
+              <a:rPr kumimoji="0" lang="pt-BR" altLang="pt-BR" sz="2400" i="0" u="none" strike="noStrike" cap="none" normalizeH="0" baseline="0" dirty="0">
+                <a:ln>
+                  <a:noFill/>
+                </a:ln>
+                <a:solidFill>
+                  <a:schemeClr val="tx1"/>
+                </a:solidFill>
+                <a:effectLst/>
+                <a:latin typeface="Arial" panose="020B0604020202020204" pitchFamily="34" charset="0"/>
+              </a:rPr>
+            </a:br>
+            <a:endParaRPr kumimoji="0" lang="pt-BR" altLang="pt-BR" sz="2400" i="0" u="none" strike="noStrike" cap="none" normalizeH="0" baseline="0" dirty="0">
+              <a:ln>
+                <a:noFill/>
+              </a:ln>
+              <a:solidFill>
+                <a:schemeClr val="tx1"/>
+              </a:solidFill>
+              <a:effectLst/>
+              <a:latin typeface="Arial" panose="020B0604020202020204" pitchFamily="34" charset="0"/>
+            </a:endParaRPr>
+          </a:p>
+          <a:p>
+            <a:pPr marR="0" lvl="0" algn="l" defTabSz="914400" rtl="0" eaLnBrk="0" fontAlgn="base" latinLnBrk="0" hangingPunct="0">
+              <a:lnSpc>
+                <a:spcPct val="100000"/>
+              </a:lnSpc>
+              <a:spcBef>
+                <a:spcPct val="0"/>
+              </a:spcBef>
+              <a:spcAft>
+                <a:spcPct val="0"/>
+              </a:spcAft>
+              <a:buClrTx/>
+              <a:buSzTx/>
+              <a:buFont typeface="Wingdings" panose="05000000000000000000" pitchFamily="2" charset="2"/>
+              <a:buChar char="§"/>
+              <a:tabLst/>
+            </a:pPr>
+            <a:r>
+              <a:rPr kumimoji="0" lang="pt-BR" altLang="pt-BR" sz="2400" i="0" u="none" strike="noStrike" cap="none" normalizeH="0" baseline="0" dirty="0">
+                <a:ln>
+                  <a:noFill/>
+                </a:ln>
+                <a:solidFill>
+                  <a:schemeClr val="tx1"/>
+                </a:solidFill>
+                <a:effectLst/>
+                <a:latin typeface="Arial" panose="020B0604020202020204" pitchFamily="34" charset="0"/>
+              </a:rPr>
+              <a:t>Criação de visualizações com </a:t>
+            </a:r>
+            <a:r>
+              <a:rPr kumimoji="0" lang="pt-BR" altLang="pt-BR" sz="2400" b="1" i="0" u="none" strike="noStrike" cap="none" normalizeH="0" baseline="0" dirty="0">
+                <a:ln>
+                  <a:noFill/>
+                </a:ln>
+                <a:solidFill>
+                  <a:schemeClr val="tx1"/>
+                </a:solidFill>
+                <a:effectLst/>
+                <a:latin typeface="Arial" panose="020B0604020202020204" pitchFamily="34" charset="0"/>
+              </a:rPr>
+              <a:t>Matplotlib</a:t>
+            </a:r>
+            <a:br>
+              <a:rPr kumimoji="0" lang="pt-BR" altLang="pt-BR" sz="2400" b="1" i="0" u="none" strike="noStrike" cap="none" normalizeH="0" baseline="0" dirty="0">
+                <a:ln>
+                  <a:noFill/>
+                </a:ln>
+                <a:solidFill>
+                  <a:schemeClr val="tx1"/>
+                </a:solidFill>
+                <a:effectLst/>
+                <a:latin typeface="Arial" panose="020B0604020202020204" pitchFamily="34" charset="0"/>
+              </a:rPr>
+            </a:br>
+            <a:endParaRPr kumimoji="0" lang="pt-BR" altLang="pt-BR" sz="2400" b="1" i="0" u="none" strike="noStrike" cap="none" normalizeH="0" baseline="0" dirty="0">
+              <a:ln>
+                <a:noFill/>
+              </a:ln>
+              <a:solidFill>
+                <a:schemeClr val="tx1"/>
+              </a:solidFill>
+              <a:effectLst/>
+              <a:latin typeface="Arial" panose="020B0604020202020204" pitchFamily="34" charset="0"/>
+            </a:endParaRPr>
+          </a:p>
+          <a:p>
+            <a:pPr marR="0" lvl="0" algn="l" defTabSz="914400" rtl="0" eaLnBrk="0" fontAlgn="base" latinLnBrk="0" hangingPunct="0">
+              <a:lnSpc>
+                <a:spcPct val="100000"/>
+              </a:lnSpc>
+              <a:spcBef>
+                <a:spcPct val="0"/>
+              </a:spcBef>
+              <a:spcAft>
+                <a:spcPct val="0"/>
+              </a:spcAft>
+              <a:buClrTx/>
+              <a:buSzTx/>
+              <a:buFont typeface="Wingdings" panose="05000000000000000000" pitchFamily="2" charset="2"/>
+              <a:buChar char="§"/>
+              <a:tabLst/>
+            </a:pPr>
+            <a:r>
+              <a:rPr kumimoji="0" lang="pt-BR" altLang="pt-BR" sz="2400" i="0" u="none" strike="noStrike" cap="none" normalizeH="0" baseline="0" dirty="0">
+                <a:ln>
+                  <a:noFill/>
+                </a:ln>
+                <a:solidFill>
+                  <a:schemeClr val="tx1"/>
+                </a:solidFill>
+                <a:effectLst/>
+                <a:latin typeface="Arial" panose="020B0604020202020204" pitchFamily="34" charset="0"/>
+              </a:rPr>
+              <a:t>Organização final da análise no </a:t>
+            </a:r>
+            <a:r>
+              <a:rPr kumimoji="0" lang="pt-BR" altLang="pt-BR" sz="2400" b="1" i="0" u="none" strike="noStrike" cap="none" normalizeH="0" baseline="0" dirty="0">
+                <a:ln>
+                  <a:noFill/>
+                </a:ln>
+                <a:solidFill>
+                  <a:schemeClr val="tx1"/>
+                </a:solidFill>
+                <a:effectLst/>
+                <a:latin typeface="Arial" panose="020B0604020202020204" pitchFamily="34" charset="0"/>
+              </a:rPr>
+              <a:t>VS Code</a:t>
+            </a:r>
           </a:p>
         </p:txBody>
       </p:sp>
     </p:spTree>
     <p:extLst>
       <p:ext uri="{BB962C8B-B14F-4D97-AF65-F5344CB8AC3E}">
-        <p14:creationId xmlns:p14="http://schemas.microsoft.com/office/powerpoint/2010/main" val="532482051"/>
+        <p14:creationId xmlns:p14="http://schemas.microsoft.com/office/powerpoint/2010/main" val="2797007317"/>
       </p:ext>
     </p:extLst>
   </p:cSld>
@@ -5392,7 +6884,13 @@
   <p:cSld>
     <p:spTree>
       <p:nvGrpSpPr>
-        <p:cNvPr id="1" name=""/>
+        <p:cNvPr id="1" name="">
+          <a:extLst>
+            <a:ext uri="{FF2B5EF4-FFF2-40B4-BE49-F238E27FC236}">
+              <a16:creationId xmlns:a16="http://schemas.microsoft.com/office/drawing/2014/main" id="{A4CCDE38-0ACA-4C47-9BC1-FFAF8512BA37}"/>
+            </a:ext>
+          </a:extLst>
+        </p:cNvPr>
         <p:cNvGrpSpPr/>
         <p:nvPr/>
       </p:nvGrpSpPr>
@@ -5409,7 +6907,7 @@
           <p:cNvPr id="2" name="Título 1">
             <a:extLst>
               <a:ext uri="{FF2B5EF4-FFF2-40B4-BE49-F238E27FC236}">
-                <a16:creationId xmlns:a16="http://schemas.microsoft.com/office/drawing/2014/main" id="{FA107F44-9E29-A0C8-8E33-CDA94C38ECB8}"/>
+                <a16:creationId xmlns:a16="http://schemas.microsoft.com/office/drawing/2014/main" id="{FA72E83D-2BD4-4ED2-10A1-739AB8CCE8AF}"/>
               </a:ext>
             </a:extLst>
           </p:cNvPr>
@@ -5422,83 +6920,198 @@
         </p:nvSpPr>
         <p:spPr>
           <a:xfrm>
-            <a:off x="2053884" y="440201"/>
-            <a:ext cx="8623495" cy="1100798"/>
+            <a:off x="1295400" y="685800"/>
+            <a:ext cx="9601200" cy="636563"/>
           </a:xfrm>
         </p:spPr>
         <p:txBody>
           <a:bodyPr>
-            <a:noAutofit/>
+            <a:normAutofit/>
           </a:bodyPr>
           <a:lstStyle/>
           <a:p>
-            <a:pPr algn="ctr"/>
-            <a:r>
-              <a:rPr lang="pt-BR" sz="4000" b="1" dirty="0"/>
-              <a:t>Sistema de Inteligência de Vendas e Controle de Estoque</a:t>
-            </a:r>
-          </a:p>
-        </p:txBody>
-      </p:sp>
-      <p:sp>
-        <p:nvSpPr>
-          <p:cNvPr id="3" name="Espaço Reservado para Conteúdo 2">
+            <a:r>
+              <a:rPr lang="pt-BR" sz="3200" dirty="0">
+                <a:latin typeface="Arial" panose="020B0604020202020204" pitchFamily="34" charset="0"/>
+                <a:cs typeface="Arial" panose="020B0604020202020204" pitchFamily="34" charset="0"/>
+              </a:rPr>
+              <a:t>Resultados da análise</a:t>
+            </a:r>
+          </a:p>
+        </p:txBody>
+      </p:sp>
+      <p:sp>
+        <p:nvSpPr>
+          <p:cNvPr id="6" name="Rectangle 2">
             <a:extLst>
               <a:ext uri="{FF2B5EF4-FFF2-40B4-BE49-F238E27FC236}">
-                <a16:creationId xmlns:a16="http://schemas.microsoft.com/office/drawing/2014/main" id="{336619E3-64F6-E5C6-8EA8-55F8AE0A0572}"/>
+                <a16:creationId xmlns:a16="http://schemas.microsoft.com/office/drawing/2014/main" id="{B59D00A8-83F8-7465-8FC1-27A75A727048}"/>
               </a:ext>
             </a:extLst>
           </p:cNvPr>
           <p:cNvSpPr>
-            <a:spLocks noGrp="1"/>
+            <a:spLocks noGrp="1" noChangeArrowheads="1"/>
           </p:cNvSpPr>
           <p:nvPr>
             <p:ph idx="1"/>
           </p:nvPr>
         </p:nvSpPr>
-        <p:spPr/>
-        <p:txBody>
-          <a:bodyPr/>
+        <p:spPr bwMode="auto">
+          <a:xfrm>
+            <a:off x="900332" y="2459504"/>
+            <a:ext cx="11291668" cy="1938992"/>
+          </a:xfrm>
+          <a:prstGeom prst="rect">
+            <a:avLst/>
+          </a:prstGeom>
+          <a:noFill/>
+          <a:ln>
+            <a:noFill/>
+          </a:ln>
+          <a:effectLst/>
+          <a:extLst>
+            <a:ext uri="{909E8E84-426E-40DD-AFC4-6F175D3DCCD1}">
+              <a14:hiddenFill xmlns:a14="http://schemas.microsoft.com/office/drawing/2010/main">
+                <a:solidFill>
+                  <a:schemeClr val="accent1"/>
+                </a:solidFill>
+              </a14:hiddenFill>
+            </a:ext>
+            <a:ext uri="{91240B29-F687-4F45-9708-019B960494DF}">
+              <a14:hiddenLine xmlns:a14="http://schemas.microsoft.com/office/drawing/2010/main" w="9525">
+                <a:solidFill>
+                  <a:schemeClr val="tx1"/>
+                </a:solidFill>
+                <a:miter lim="800000"/>
+                <a:headEnd/>
+                <a:tailEnd/>
+              </a14:hiddenLine>
+            </a:ext>
+            <a:ext uri="{AF507438-7753-43E0-B8FC-AC1667EBCBE1}">
+              <a14:hiddenEffects xmlns:a14="http://schemas.microsoft.com/office/drawing/2010/main">
+                <a:effectLst>
+                  <a:outerShdw dist="35921" dir="2700000" algn="ctr" rotWithShape="0">
+                    <a:schemeClr val="bg2"/>
+                  </a:outerShdw>
+                </a:effectLst>
+              </a14:hiddenEffects>
+            </a:ext>
+          </a:extLst>
+        </p:spPr>
+        <p:txBody>
+          <a:bodyPr vert="horz" wrap="square" lIns="91440" tIns="45720" rIns="91440" bIns="45720" numCol="1" anchor="ctr" anchorCtr="0" compatLnSpc="1">
+            <a:prstTxWarp prst="textNoShape">
+              <a:avLst/>
+            </a:prstTxWarp>
+            <a:spAutoFit/>
+          </a:bodyPr>
           <a:lstStyle/>
           <a:p>
-            <a:pPr marL="0" indent="0" algn="ctr">
-              <a:buNone/>
+            <a:pPr eaLnBrk="0" fontAlgn="base" hangingPunct="0">
+              <a:lnSpc>
+                <a:spcPct val="100000"/>
+              </a:lnSpc>
+              <a:spcBef>
+                <a:spcPct val="0"/>
+              </a:spcBef>
+              <a:spcAft>
+                <a:spcPct val="0"/>
+              </a:spcAft>
+              <a:buFont typeface="Wingdings" panose="05000000000000000000" pitchFamily="2" charset="2"/>
+              <a:buChar char="§"/>
             </a:pPr>
             <a:r>
-              <a:rPr lang="pt-BR" sz="2400" dirty="0"/>
-              <a:t>O objetivo é simular um ambiente corporativo real, unindo a robustez do PostgreSQL à agilidade na tomada de decisão. </a:t>
-            </a:r>
-          </a:p>
-          <a:p>
-            <a:pPr marL="0" indent="0" algn="ctr">
-              <a:buNone/>
+              <a:rPr lang="pt-BR" altLang="pt-BR" sz="2400" dirty="0">
+                <a:solidFill>
+                  <a:schemeClr val="tx1"/>
+                </a:solidFill>
+                <a:latin typeface="Arial" panose="020B0604020202020204" pitchFamily="34" charset="0"/>
+              </a:rPr>
+              <a:t>Identificação do faturamento total e evolução mensal</a:t>
+            </a:r>
+            <a:br>
+              <a:rPr lang="pt-BR" altLang="pt-BR" sz="2400" dirty="0">
+                <a:solidFill>
+                  <a:schemeClr val="tx1"/>
+                </a:solidFill>
+                <a:latin typeface="Arial" panose="020B0604020202020204" pitchFamily="34" charset="0"/>
+              </a:rPr>
+            </a:br>
+            <a:endParaRPr lang="pt-BR" altLang="pt-BR" sz="2400" dirty="0">
+              <a:solidFill>
+                <a:schemeClr val="tx1"/>
+              </a:solidFill>
+              <a:latin typeface="Arial" panose="020B0604020202020204" pitchFamily="34" charset="0"/>
+            </a:endParaRPr>
+          </a:p>
+          <a:p>
+            <a:pPr eaLnBrk="0" fontAlgn="base" hangingPunct="0">
+              <a:lnSpc>
+                <a:spcPct val="100000"/>
+              </a:lnSpc>
+              <a:spcBef>
+                <a:spcPct val="0"/>
+              </a:spcBef>
+              <a:spcAft>
+                <a:spcPct val="0"/>
+              </a:spcAft>
+              <a:buFont typeface="Wingdings" panose="05000000000000000000" pitchFamily="2" charset="2"/>
+              <a:buChar char="§"/>
             </a:pPr>
             <a:r>
-              <a:rPr lang="pt-BR" sz="2400" dirty="0"/>
-              <a:t>Realizei a inserção de dados em massa para gerar volume, permitindo testes reais de performance e criação de KPIs. Estruturei queries em SQL para converter dados brutos em inteligência, focando em monitoramento financeiro e controle logístico.</a:t>
-            </a:r>
-          </a:p>
-          <a:p>
-            <a:pPr marL="0" indent="0" algn="ctr">
-              <a:buNone/>
+              <a:rPr lang="pt-BR" altLang="pt-BR" sz="2400" dirty="0">
+                <a:solidFill>
+                  <a:schemeClr val="tx1"/>
+                </a:solidFill>
+                <a:latin typeface="Arial" panose="020B0604020202020204" pitchFamily="34" charset="0"/>
+              </a:rPr>
+              <a:t>Comparação de desempenho entre canais de venda</a:t>
+            </a:r>
+            <a:br>
+              <a:rPr lang="pt-BR" altLang="pt-BR" sz="2400" dirty="0">
+                <a:solidFill>
+                  <a:schemeClr val="tx1"/>
+                </a:solidFill>
+                <a:latin typeface="Arial" panose="020B0604020202020204" pitchFamily="34" charset="0"/>
+              </a:rPr>
+            </a:br>
+            <a:endParaRPr lang="pt-BR" altLang="pt-BR" sz="2400" dirty="0">
+              <a:solidFill>
+                <a:schemeClr val="tx1"/>
+              </a:solidFill>
+              <a:latin typeface="Arial" panose="020B0604020202020204" pitchFamily="34" charset="0"/>
+            </a:endParaRPr>
+          </a:p>
+          <a:p>
+            <a:pPr eaLnBrk="0" fontAlgn="base" hangingPunct="0">
+              <a:lnSpc>
+                <a:spcPct val="100000"/>
+              </a:lnSpc>
+              <a:spcBef>
+                <a:spcPct val="0"/>
+              </a:spcBef>
+              <a:spcAft>
+                <a:spcPct val="0"/>
+              </a:spcAft>
+              <a:buFont typeface="Wingdings" panose="05000000000000000000" pitchFamily="2" charset="2"/>
+              <a:buChar char="§"/>
             </a:pPr>
             <a:r>
-              <a:rPr lang="pt-BR" sz="2400" dirty="0"/>
-              <a:t>O resultado final é um fluxo que identifica desde o faturamento total até alertas críticos de reposição de estoque.</a:t>
-            </a:r>
-          </a:p>
-          <a:p>
-            <a:pPr marL="0" indent="0">
-              <a:buNone/>
-            </a:pPr>
-            <a:endParaRPr lang="pt-BR" dirty="0"/>
+              <a:rPr lang="pt-BR" altLang="pt-BR" sz="2400" dirty="0">
+                <a:solidFill>
+                  <a:schemeClr val="tx1"/>
+                </a:solidFill>
+                <a:latin typeface="Arial" panose="020B0604020202020204" pitchFamily="34" charset="0"/>
+              </a:rPr>
+              <a:t>Identificação de padrões de receita e possíveis sazonalidades</a:t>
+            </a:r>
           </a:p>
         </p:txBody>
       </p:sp>
     </p:spTree>
     <p:extLst>
       <p:ext uri="{BB962C8B-B14F-4D97-AF65-F5344CB8AC3E}">
-        <p14:creationId xmlns:p14="http://schemas.microsoft.com/office/powerpoint/2010/main" val="482527965"/>
+        <p14:creationId xmlns:p14="http://schemas.microsoft.com/office/powerpoint/2010/main" val="1723385772"/>
       </p:ext>
     </p:extLst>
   </p:cSld>
@@ -5527,55 +7140,306 @@
       </p:grpSpPr>
       <p:sp>
         <p:nvSpPr>
-          <p:cNvPr id="4" name="AutoShape 2">
+          <p:cNvPr id="2" name="Título 1">
             <a:extLst>
               <a:ext uri="{FF2B5EF4-FFF2-40B4-BE49-F238E27FC236}">
-                <a16:creationId xmlns:a16="http://schemas.microsoft.com/office/drawing/2014/main" id="{6AE7934D-D9DD-FB92-EFB7-21DBF2A8DAAF}"/>
+                <a16:creationId xmlns:a16="http://schemas.microsoft.com/office/drawing/2014/main" id="{4D665F8D-3B9F-6D0C-9973-6847E2E5C5F6}"/>
               </a:ext>
             </a:extLst>
           </p:cNvPr>
           <p:cNvSpPr>
-            <a:spLocks noChangeAspect="1" noChangeArrowheads="1"/>
-          </p:cNvSpPr>
-          <p:nvPr/>
+            <a:spLocks noGrp="1"/>
+          </p:cNvSpPr>
+          <p:nvPr>
+            <p:ph type="title"/>
+          </p:nvPr>
+        </p:nvSpPr>
+        <p:spPr>
+          <a:xfrm>
+            <a:off x="1178050" y="546992"/>
+            <a:ext cx="9601200" cy="780143"/>
+          </a:xfrm>
+        </p:spPr>
+        <p:txBody>
+          <a:bodyPr>
+            <a:normAutofit/>
+          </a:bodyPr>
+          <a:lstStyle/>
+          <a:p>
+            <a:r>
+              <a:rPr lang="pt-BR" sz="3200" dirty="0">
+                <a:latin typeface="Arial" panose="020B0604020202020204" pitchFamily="34" charset="0"/>
+                <a:cs typeface="Arial" panose="020B0604020202020204" pitchFamily="34" charset="0"/>
+              </a:rPr>
+              <a:t>Tratamento e preparação de dados</a:t>
+            </a:r>
+          </a:p>
+        </p:txBody>
+      </p:sp>
+      <p:sp>
+        <p:nvSpPr>
+          <p:cNvPr id="4" name="Rectangle 1">
+            <a:extLst>
+              <a:ext uri="{FF2B5EF4-FFF2-40B4-BE49-F238E27FC236}">
+                <a16:creationId xmlns:a16="http://schemas.microsoft.com/office/drawing/2014/main" id="{622D795B-6E8C-6C5D-A61C-C3118C1B7C60}"/>
+              </a:ext>
+            </a:extLst>
+          </p:cNvPr>
+          <p:cNvSpPr>
+            <a:spLocks noGrp="1" noChangeArrowheads="1"/>
+          </p:cNvSpPr>
+          <p:nvPr>
+            <p:ph idx="1"/>
+          </p:nvPr>
         </p:nvSpPr>
         <p:spPr bwMode="auto">
           <a:xfrm>
-            <a:off x="5943600" y="3276600"/>
-            <a:ext cx="304800" cy="304800"/>
+            <a:off x="903340" y="2090172"/>
+            <a:ext cx="9464549" cy="2677656"/>
           </a:xfrm>
           <a:prstGeom prst="rect">
             <a:avLst/>
           </a:prstGeom>
           <a:noFill/>
+          <a:ln>
+            <a:noFill/>
+          </a:ln>
+          <a:effectLst/>
           <a:extLst>
             <a:ext uri="{909E8E84-426E-40DD-AFC4-6F175D3DCCD1}">
               <a14:hiddenFill xmlns:a14="http://schemas.microsoft.com/office/drawing/2010/main">
                 <a:solidFill>
-                  <a:srgbClr val="FFFFFF"/>
+                  <a:schemeClr val="accent1"/>
                 </a:solidFill>
               </a14:hiddenFill>
             </a:ext>
+            <a:ext uri="{91240B29-F687-4F45-9708-019B960494DF}">
+              <a14:hiddenLine xmlns:a14="http://schemas.microsoft.com/office/drawing/2010/main" w="9525">
+                <a:solidFill>
+                  <a:schemeClr val="tx1"/>
+                </a:solidFill>
+                <a:miter lim="800000"/>
+                <a:headEnd/>
+                <a:tailEnd/>
+              </a14:hiddenLine>
+            </a:ext>
+            <a:ext uri="{AF507438-7753-43E0-B8FC-AC1667EBCBE1}">
+              <a14:hiddenEffects xmlns:a14="http://schemas.microsoft.com/office/drawing/2010/main">
+                <a:effectLst>
+                  <a:outerShdw dist="35921" dir="2700000" algn="ctr" rotWithShape="0">
+                    <a:schemeClr val="bg2"/>
+                  </a:outerShdw>
+                </a:effectLst>
+              </a14:hiddenEffects>
+            </a:ext>
           </a:extLst>
         </p:spPr>
         <p:txBody>
-          <a:bodyPr vert="horz" wrap="square" lIns="91440" tIns="45720" rIns="91440" bIns="45720" numCol="1" anchor="t" anchorCtr="0" compatLnSpc="1">
+          <a:bodyPr vert="horz" wrap="square" lIns="91440" tIns="45720" rIns="91440" bIns="45720" numCol="1" anchor="ctr" anchorCtr="0" compatLnSpc="1">
             <a:prstTxWarp prst="textNoShape">
               <a:avLst/>
             </a:prstTxWarp>
+            <a:spAutoFit/>
           </a:bodyPr>
           <a:lstStyle/>
           <a:p>
-            <a:endParaRPr lang="pt-BR"/>
-          </a:p>
-        </p:txBody>
-      </p:sp>
-      <p:sp>
-        <p:nvSpPr>
-          <p:cNvPr id="8" name="CaixaDeTexto 7">
+            <a:pPr marR="0" lvl="0" algn="l" defTabSz="914400" rtl="0" eaLnBrk="0" fontAlgn="base" latinLnBrk="0" hangingPunct="0">
+              <a:lnSpc>
+                <a:spcPct val="100000"/>
+              </a:lnSpc>
+              <a:spcBef>
+                <a:spcPct val="0"/>
+              </a:spcBef>
+              <a:spcAft>
+                <a:spcPct val="0"/>
+              </a:spcAft>
+              <a:buClrTx/>
+              <a:buSzTx/>
+              <a:buFont typeface="Wingdings" panose="05000000000000000000" pitchFamily="2" charset="2"/>
+              <a:buChar char="§"/>
+              <a:tabLst/>
+            </a:pPr>
+            <a:r>
+              <a:rPr kumimoji="0" lang="pt-BR" altLang="pt-BR" sz="2400" b="0" i="0" u="none" strike="noStrike" cap="none" normalizeH="0" baseline="0" dirty="0">
+                <a:ln>
+                  <a:noFill/>
+                </a:ln>
+                <a:solidFill>
+                  <a:schemeClr val="tx1"/>
+                </a:solidFill>
+                <a:effectLst/>
+                <a:latin typeface="Arial" panose="020B0604020202020204" pitchFamily="34" charset="0"/>
+              </a:rPr>
+              <a:t>Conversão de tipos de dados (datetime)</a:t>
+            </a:r>
+            <a:br>
+              <a:rPr kumimoji="0" lang="pt-BR" altLang="pt-BR" sz="2400" b="0" i="0" u="none" strike="noStrike" cap="none" normalizeH="0" baseline="0" dirty="0">
+                <a:ln>
+                  <a:noFill/>
+                </a:ln>
+                <a:solidFill>
+                  <a:schemeClr val="tx1"/>
+                </a:solidFill>
+                <a:effectLst/>
+                <a:latin typeface="Arial" panose="020B0604020202020204" pitchFamily="34" charset="0"/>
+              </a:rPr>
+            </a:br>
+            <a:endParaRPr kumimoji="0" lang="pt-BR" altLang="pt-BR" sz="2400" b="0" i="0" u="none" strike="noStrike" cap="none" normalizeH="0" baseline="0" dirty="0">
+              <a:ln>
+                <a:noFill/>
+              </a:ln>
+              <a:solidFill>
+                <a:schemeClr val="tx1"/>
+              </a:solidFill>
+              <a:effectLst/>
+              <a:latin typeface="Arial" panose="020B0604020202020204" pitchFamily="34" charset="0"/>
+            </a:endParaRPr>
+          </a:p>
+          <a:p>
+            <a:pPr marR="0" lvl="0" algn="l" defTabSz="914400" rtl="0" eaLnBrk="0" fontAlgn="base" latinLnBrk="0" hangingPunct="0">
+              <a:lnSpc>
+                <a:spcPct val="100000"/>
+              </a:lnSpc>
+              <a:spcBef>
+                <a:spcPct val="0"/>
+              </a:spcBef>
+              <a:spcAft>
+                <a:spcPct val="0"/>
+              </a:spcAft>
+              <a:buClrTx/>
+              <a:buSzTx/>
+              <a:buFont typeface="Wingdings" panose="05000000000000000000" pitchFamily="2" charset="2"/>
+              <a:buChar char="§"/>
+              <a:tabLst/>
+            </a:pPr>
+            <a:r>
+              <a:rPr kumimoji="0" lang="pt-BR" altLang="pt-BR" sz="2400" b="0" i="0" u="none" strike="noStrike" cap="none" normalizeH="0" baseline="0" dirty="0">
+                <a:ln>
+                  <a:noFill/>
+                </a:ln>
+                <a:solidFill>
+                  <a:schemeClr val="tx1"/>
+                </a:solidFill>
+                <a:effectLst/>
+                <a:latin typeface="Arial" panose="020B0604020202020204" pitchFamily="34" charset="0"/>
+              </a:rPr>
+              <a:t>Validação e organização das colunas</a:t>
+            </a:r>
+            <a:br>
+              <a:rPr kumimoji="0" lang="pt-BR" altLang="pt-BR" sz="2400" b="0" i="0" u="none" strike="noStrike" cap="none" normalizeH="0" baseline="0" dirty="0">
+                <a:ln>
+                  <a:noFill/>
+                </a:ln>
+                <a:solidFill>
+                  <a:schemeClr val="tx1"/>
+                </a:solidFill>
+                <a:effectLst/>
+                <a:latin typeface="Arial" panose="020B0604020202020204" pitchFamily="34" charset="0"/>
+              </a:rPr>
+            </a:br>
+            <a:endParaRPr kumimoji="0" lang="pt-BR" altLang="pt-BR" sz="2400" b="0" i="0" u="none" strike="noStrike" cap="none" normalizeH="0" baseline="0" dirty="0">
+              <a:ln>
+                <a:noFill/>
+              </a:ln>
+              <a:solidFill>
+                <a:schemeClr val="tx1"/>
+              </a:solidFill>
+              <a:effectLst/>
+              <a:latin typeface="Arial" panose="020B0604020202020204" pitchFamily="34" charset="0"/>
+            </a:endParaRPr>
+          </a:p>
+          <a:p>
+            <a:pPr marR="0" lvl="0" algn="l" defTabSz="914400" rtl="0" eaLnBrk="0" fontAlgn="base" latinLnBrk="0" hangingPunct="0">
+              <a:lnSpc>
+                <a:spcPct val="100000"/>
+              </a:lnSpc>
+              <a:spcBef>
+                <a:spcPct val="0"/>
+              </a:spcBef>
+              <a:spcAft>
+                <a:spcPct val="0"/>
+              </a:spcAft>
+              <a:buClrTx/>
+              <a:buSzTx/>
+              <a:buFont typeface="Wingdings" panose="05000000000000000000" pitchFamily="2" charset="2"/>
+              <a:buChar char="§"/>
+              <a:tabLst/>
+            </a:pPr>
+            <a:r>
+              <a:rPr kumimoji="0" lang="pt-BR" altLang="pt-BR" sz="2400" b="0" i="0" u="none" strike="noStrike" cap="none" normalizeH="0" baseline="0" dirty="0">
+                <a:ln>
+                  <a:noFill/>
+                </a:ln>
+                <a:solidFill>
+                  <a:schemeClr val="tx1"/>
+                </a:solidFill>
+                <a:effectLst/>
+                <a:latin typeface="Arial" panose="020B0604020202020204" pitchFamily="34" charset="0"/>
+              </a:rPr>
+              <a:t>Estruturação para análise temporal</a:t>
+            </a:r>
+            <a:br>
+              <a:rPr kumimoji="0" lang="pt-BR" altLang="pt-BR" sz="2400" b="0" i="0" u="none" strike="noStrike" cap="none" normalizeH="0" baseline="0" dirty="0">
+                <a:ln>
+                  <a:noFill/>
+                </a:ln>
+                <a:solidFill>
+                  <a:schemeClr val="tx1"/>
+                </a:solidFill>
+                <a:effectLst/>
+                <a:latin typeface="Arial" panose="020B0604020202020204" pitchFamily="34" charset="0"/>
+              </a:rPr>
+            </a:br>
+            <a:endParaRPr kumimoji="0" lang="pt-BR" altLang="pt-BR" sz="2400" b="0" i="0" u="none" strike="noStrike" cap="none" normalizeH="0" baseline="0" dirty="0">
+              <a:ln>
+                <a:noFill/>
+              </a:ln>
+              <a:solidFill>
+                <a:schemeClr val="tx1"/>
+              </a:solidFill>
+              <a:effectLst/>
+              <a:latin typeface="Arial" panose="020B0604020202020204" pitchFamily="34" charset="0"/>
+            </a:endParaRPr>
+          </a:p>
+          <a:p>
+            <a:pPr marR="0" lvl="0" algn="l" defTabSz="914400" rtl="0" eaLnBrk="0" fontAlgn="base" latinLnBrk="0" hangingPunct="0">
+              <a:lnSpc>
+                <a:spcPct val="100000"/>
+              </a:lnSpc>
+              <a:spcBef>
+                <a:spcPct val="0"/>
+              </a:spcBef>
+              <a:spcAft>
+                <a:spcPct val="0"/>
+              </a:spcAft>
+              <a:buClrTx/>
+              <a:buSzTx/>
+              <a:buFont typeface="Wingdings" panose="05000000000000000000" pitchFamily="2" charset="2"/>
+              <a:buChar char="§"/>
+              <a:tabLst/>
+            </a:pPr>
+            <a:r>
+              <a:rPr kumimoji="0" lang="pt-BR" altLang="pt-BR" sz="2400" b="0" i="0" u="none" strike="noStrike" cap="none" normalizeH="0" baseline="0" dirty="0">
+                <a:ln>
+                  <a:noFill/>
+                </a:ln>
+                <a:solidFill>
+                  <a:schemeClr val="tx1"/>
+                </a:solidFill>
+                <a:effectLst/>
+                <a:latin typeface="Arial" panose="020B0604020202020204" pitchFamily="34" charset="0"/>
+              </a:rPr>
+              <a:t>Preparação para análise por canal e faturamento</a:t>
+            </a:r>
+          </a:p>
+        </p:txBody>
+      </p:sp>
+      <p:sp>
+        <p:nvSpPr>
+          <p:cNvPr id="5" name="CaixaDeTexto 4">
             <a:extLst>
               <a:ext uri="{FF2B5EF4-FFF2-40B4-BE49-F238E27FC236}">
-                <a16:creationId xmlns:a16="http://schemas.microsoft.com/office/drawing/2014/main" id="{3D449E19-8763-78BC-BE83-E2C78954654D}"/>
+                <a16:creationId xmlns:a16="http://schemas.microsoft.com/office/drawing/2014/main" id="{0CC7FAC1-3FF4-F3DF-7745-C98A12E4C180}"/>
               </a:ext>
             </a:extLst>
           </p:cNvPr>
@@ -5583,9 +7447,9 @@
           <p:nvPr/>
         </p:nvSpPr>
         <p:spPr>
-          <a:xfrm rot="10800000" flipV="1">
-            <a:off x="1560999" y="134537"/>
-            <a:ext cx="9374801" cy="2308324"/>
+          <a:xfrm>
+            <a:off x="1899203" y="5849343"/>
+            <a:ext cx="9772227" cy="461665"/>
           </a:xfrm>
           <a:prstGeom prst="rect">
             <a:avLst/>
@@ -5593,67 +7457,26 @@
           <a:noFill/>
         </p:spPr>
         <p:txBody>
-          <a:bodyPr wrap="square" rtlCol="0">
+          <a:bodyPr wrap="none" rtlCol="0">
             <a:spAutoFit/>
           </a:bodyPr>
           <a:lstStyle/>
           <a:p>
             <a:pPr algn="ctr"/>
             <a:r>
-              <a:rPr lang="pt-BR" sz="2400" dirty="0"/>
-              <a:t>Com um faturamento identificado de R$ 213.590,14, a análise de dados permitiu localizar gargalos financeiros importantes. O monitoramento de pedidos pendentes e cancelados revelou uma taxa crítica de desistência em métodos específicos (como Pix e Boleto), apontando oportunidades de melhoria no processo de checkout e na conversão de vendas.</a:t>
-            </a:r>
-          </a:p>
-        </p:txBody>
-      </p:sp>
-      <p:pic>
-        <p:nvPicPr>
-          <p:cNvPr id="11" name="Espaço Reservado para Conteúdo 10">
-            <a:extLst>
-              <a:ext uri="{FF2B5EF4-FFF2-40B4-BE49-F238E27FC236}">
-                <a16:creationId xmlns:a16="http://schemas.microsoft.com/office/drawing/2014/main" id="{67C949F5-1E05-7996-8D7C-33B73718531C}"/>
-              </a:ext>
-            </a:extLst>
-          </p:cNvPr>
-          <p:cNvPicPr>
-            <a:picLocks noGrp="1" noChangeAspect="1"/>
-          </p:cNvPicPr>
-          <p:nvPr>
-            <p:ph idx="1"/>
-          </p:nvPr>
-        </p:nvPicPr>
-        <p:blipFill>
-          <a:blip r:embed="rId2">
-            <a:extLst>
-              <a:ext uri="{BEBA8EAE-BF5A-486C-A8C5-ECC9F3942E4B}">
-                <a14:imgProps xmlns:a14="http://schemas.microsoft.com/office/drawing/2010/main">
-                  <a14:imgLayer r:embed="rId3">
-                    <a14:imgEffect>
-                      <a14:sharpenSoften amount="25000"/>
-                    </a14:imgEffect>
-                  </a14:imgLayer>
-                </a14:imgProps>
-              </a:ext>
-            </a:extLst>
-          </a:blip>
-          <a:stretch>
-            <a:fillRect/>
-          </a:stretch>
-        </p:blipFill>
-        <p:spPr>
-          <a:xfrm>
-            <a:off x="2090731" y="2446886"/>
-            <a:ext cx="8665867" cy="4276578"/>
-          </a:xfrm>
-          <a:prstGeom prst="rect">
-            <a:avLst/>
-          </a:prstGeom>
-        </p:spPr>
-      </p:pic>
+              <a:rPr lang="pt-BR" sz="2400" b="1" dirty="0">
+                <a:latin typeface="Arial" panose="020B0604020202020204" pitchFamily="34" charset="0"/>
+                <a:cs typeface="Arial" panose="020B0604020202020204" pitchFamily="34" charset="0"/>
+              </a:rPr>
+              <a:t>Garantia de consistência e qualidade dos dados antes da análise.</a:t>
+            </a:r>
+          </a:p>
+        </p:txBody>
+      </p:sp>
     </p:spTree>
     <p:extLst>
       <p:ext uri="{BB962C8B-B14F-4D97-AF65-F5344CB8AC3E}">
-        <p14:creationId xmlns:p14="http://schemas.microsoft.com/office/powerpoint/2010/main" val="178324957"/>
+        <p14:creationId xmlns:p14="http://schemas.microsoft.com/office/powerpoint/2010/main" val="1627534230"/>
       </p:ext>
     </p:extLst>
   </p:cSld>
@@ -5685,7 +7508,7 @@
           <p:cNvPr id="2" name="Título 1">
             <a:extLst>
               <a:ext uri="{FF2B5EF4-FFF2-40B4-BE49-F238E27FC236}">
-                <a16:creationId xmlns:a16="http://schemas.microsoft.com/office/drawing/2014/main" id="{7263B394-6D90-34CD-929F-B51FE48AB68A}"/>
+                <a16:creationId xmlns:a16="http://schemas.microsoft.com/office/drawing/2014/main" id="{78FF116A-7635-3D75-109B-718197F32954}"/>
               </a:ext>
             </a:extLst>
           </p:cNvPr>
@@ -5698,8 +7521,8 @@
         </p:nvSpPr>
         <p:spPr>
           <a:xfrm>
-            <a:off x="1371600" y="685800"/>
-            <a:ext cx="9601200" cy="960120"/>
+            <a:off x="1023255" y="555844"/>
+            <a:ext cx="9601200" cy="736600"/>
           </a:xfrm>
         </p:spPr>
         <p:txBody>
@@ -5709,105 +7532,136 @@
           <a:lstStyle/>
           <a:p>
             <a:r>
-              <a:rPr lang="pt-BR" sz="4000" dirty="0"/>
-              <a:t>Diagnóstico de Perda de Receita via SQL</a:t>
-            </a:r>
-          </a:p>
-        </p:txBody>
-      </p:sp>
-      <p:sp>
-        <p:nvSpPr>
-          <p:cNvPr id="3" name="Espaço Reservado para Conteúdo 2">
+              <a:rPr lang="pt-BR" sz="3200" dirty="0"/>
+              <a:t>Análise Exploratória de Dados (EDA)</a:t>
+            </a:r>
+          </a:p>
+        </p:txBody>
+      </p:sp>
+      <p:sp>
+        <p:nvSpPr>
+          <p:cNvPr id="10" name="CaixaDeTexto 9">
             <a:extLst>
               <a:ext uri="{FF2B5EF4-FFF2-40B4-BE49-F238E27FC236}">
-                <a16:creationId xmlns:a16="http://schemas.microsoft.com/office/drawing/2014/main" id="{5B24EC12-A0C4-F949-49DB-39BA9C3AEE52}"/>
+                <a16:creationId xmlns:a16="http://schemas.microsoft.com/office/drawing/2014/main" id="{68B662F1-6472-DDF9-4BF1-45D5A112623C}"/>
               </a:ext>
             </a:extLst>
           </p:cNvPr>
-          <p:cNvSpPr>
-            <a:spLocks noGrp="1"/>
-          </p:cNvSpPr>
-          <p:nvPr>
-            <p:ph idx="1"/>
-          </p:nvPr>
-        </p:nvSpPr>
-        <p:spPr>
-          <a:xfrm>
-            <a:off x="1371600" y="1930791"/>
-            <a:ext cx="4086665" cy="4241409"/>
-          </a:xfrm>
-        </p:spPr>
-        <p:txBody>
-          <a:bodyPr>
-            <a:noAutofit/>
+          <p:cNvSpPr txBox="1"/>
+          <p:nvPr/>
+        </p:nvSpPr>
+        <p:spPr>
+          <a:xfrm>
+            <a:off x="1023255" y="1874728"/>
+            <a:ext cx="9724071" cy="2677656"/>
+          </a:xfrm>
+          <a:prstGeom prst="rect">
+            <a:avLst/>
+          </a:prstGeom>
+          <a:noFill/>
+        </p:spPr>
+        <p:txBody>
+          <a:bodyPr wrap="square" rtlCol="0">
+            <a:spAutoFit/>
           </a:bodyPr>
           <a:lstStyle/>
           <a:p>
-            <a:pPr marL="0" indent="0">
-              <a:buNone/>
+            <a:pPr marL="285750" indent="-285750">
+              <a:buFont typeface="Wingdings" panose="05000000000000000000" pitchFamily="2" charset="2"/>
+              <a:buChar char="§"/>
             </a:pPr>
             <a:r>
               <a:rPr lang="pt-BR" sz="2400" dirty="0"/>
-              <a:t>Desenvolvi uma consulta para extrair e somar o valor total de pedidos que não foram convertidos (status 'Cancelado' ou 'Pendente’)</a:t>
-            </a:r>
-          </a:p>
-          <a:p>
-            <a:pPr marL="0" indent="0">
-              <a:buNone/>
+              <a:t>Cálculo de faturamento total</a:t>
+            </a:r>
+            <a:br>
+              <a:rPr lang="pt-BR" sz="2400" dirty="0"/>
+            </a:br>
+            <a:endParaRPr lang="pt-BR" sz="2400" dirty="0"/>
+          </a:p>
+          <a:p>
+            <a:pPr marL="285750" indent="-285750">
+              <a:buFont typeface="Wingdings" panose="05000000000000000000" pitchFamily="2" charset="2"/>
+              <a:buChar char="§"/>
             </a:pPr>
             <a:r>
               <a:rPr lang="pt-BR" sz="2400" dirty="0"/>
-              <a:t>A análise permitiu identificar um prejuízo acumulado de mais de R$ 523 mil, fornecendo os dados necessários para que a equipe de marketing e tecnologia crie estratégias de recuperação de carrinho.</a:t>
-            </a:r>
-          </a:p>
-        </p:txBody>
-      </p:sp>
-      <p:pic>
-        <p:nvPicPr>
-          <p:cNvPr id="5" name="Imagem 4">
+              <a:t>Receita por canal de vendas</a:t>
+            </a:r>
+            <a:br>
+              <a:rPr lang="pt-BR" sz="2400" dirty="0"/>
+            </a:br>
+            <a:endParaRPr lang="pt-BR" sz="2400" dirty="0"/>
+          </a:p>
+          <a:p>
+            <a:pPr marL="285750" indent="-285750">
+              <a:buFont typeface="Wingdings" panose="05000000000000000000" pitchFamily="2" charset="2"/>
+              <a:buChar char="§"/>
+            </a:pPr>
+            <a:r>
+              <a:rPr lang="pt-BR" sz="2400" dirty="0"/>
+              <a:t>Evolução da receita ao longo do tempo</a:t>
+            </a:r>
+            <a:br>
+              <a:rPr lang="pt-BR" sz="2400" dirty="0"/>
+            </a:br>
+            <a:endParaRPr lang="pt-BR" sz="2400" dirty="0"/>
+          </a:p>
+          <a:p>
+            <a:pPr marL="285750" indent="-285750">
+              <a:buFont typeface="Wingdings" panose="05000000000000000000" pitchFamily="2" charset="2"/>
+              <a:buChar char="§"/>
+            </a:pPr>
+            <a:r>
+              <a:rPr lang="pt-BR" sz="2400" dirty="0"/>
+              <a:t>Quantidade de vendas por canal</a:t>
+            </a:r>
+          </a:p>
+        </p:txBody>
+      </p:sp>
+      <p:sp>
+        <p:nvSpPr>
+          <p:cNvPr id="13" name="CaixaDeTexto 12">
             <a:extLst>
               <a:ext uri="{FF2B5EF4-FFF2-40B4-BE49-F238E27FC236}">
-                <a16:creationId xmlns:a16="http://schemas.microsoft.com/office/drawing/2014/main" id="{D28C1DAB-A61D-CFCF-5844-386AC9B94DA9}"/>
+                <a16:creationId xmlns:a16="http://schemas.microsoft.com/office/drawing/2014/main" id="{F272519A-5A4E-4E71-2A07-28C52CE1BE38}"/>
               </a:ext>
             </a:extLst>
           </p:cNvPr>
-          <p:cNvPicPr>
-            <a:picLocks noChangeAspect="1"/>
-          </p:cNvPicPr>
+          <p:cNvSpPr txBox="1"/>
           <p:nvPr/>
-        </p:nvPicPr>
-        <p:blipFill>
-          <a:blip r:embed="rId2">
-            <a:extLst>
-              <a:ext uri="{BEBA8EAE-BF5A-486C-A8C5-ECC9F3942E4B}">
-                <a14:imgProps xmlns:a14="http://schemas.microsoft.com/office/drawing/2010/main">
-                  <a14:imgLayer r:embed="rId3">
-                    <a14:imgEffect>
-                      <a14:sharpenSoften amount="25000"/>
-                    </a14:imgEffect>
-                  </a14:imgLayer>
-                </a14:imgProps>
-              </a:ext>
-            </a:extLst>
-          </a:blip>
-          <a:stretch>
-            <a:fillRect/>
-          </a:stretch>
-        </p:blipFill>
-        <p:spPr>
-          <a:xfrm>
-            <a:off x="5600987" y="2701435"/>
-            <a:ext cx="6021272" cy="1984866"/>
+        </p:nvSpPr>
+        <p:spPr>
+          <a:xfrm>
+            <a:off x="1708815" y="5840491"/>
+            <a:ext cx="9381094" cy="461665"/>
           </a:xfrm>
           <a:prstGeom prst="rect">
             <a:avLst/>
           </a:prstGeom>
-        </p:spPr>
-      </p:pic>
+          <a:noFill/>
+        </p:spPr>
+        <p:txBody>
+          <a:bodyPr wrap="none" rtlCol="0">
+            <a:spAutoFit/>
+          </a:bodyPr>
+          <a:lstStyle/>
+          <a:p>
+            <a:pPr algn="ctr"/>
+            <a:r>
+              <a:rPr lang="pt-BR" sz="2400" b="1" dirty="0">
+                <a:latin typeface="Arial" panose="020B0604020202020204" pitchFamily="34" charset="0"/>
+                <a:cs typeface="Arial" panose="020B0604020202020204" pitchFamily="34" charset="0"/>
+              </a:rPr>
+              <a:t>Identificação de padrões de vendas e desempenho dos canais.</a:t>
+            </a:r>
+          </a:p>
+        </p:txBody>
+      </p:sp>
     </p:spTree>
     <p:extLst>
       <p:ext uri="{BB962C8B-B14F-4D97-AF65-F5344CB8AC3E}">
-        <p14:creationId xmlns:p14="http://schemas.microsoft.com/office/powerpoint/2010/main" val="331135505"/>
+        <p14:creationId xmlns:p14="http://schemas.microsoft.com/office/powerpoint/2010/main" val="2600723110"/>
       </p:ext>
     </p:extLst>
   </p:cSld>
